--- a/Student Presentation/CSS Corners, Borders and Shadows.pptx
+++ b/Student Presentation/CSS Corners, Borders and Shadows.pptx
@@ -5,7 +5,7 @@
     <p:sldMasterId id="2147483648" r:id="rId1"/>
   </p:sldMasterIdLst>
   <p:notesMasterIdLst>
-    <p:notesMasterId r:id="rId9"/>
+    <p:notesMasterId r:id="rId12"/>
   </p:notesMasterIdLst>
   <p:sldIdLst>
     <p:sldId id="256" r:id="rId2"/>
@@ -15,6 +15,9 @@
     <p:sldId id="260" r:id="rId6"/>
     <p:sldId id="262" r:id="rId7"/>
     <p:sldId id="259" r:id="rId8"/>
+    <p:sldId id="264" r:id="rId9"/>
+    <p:sldId id="267" r:id="rId10"/>
+    <p:sldId id="268" r:id="rId11"/>
   </p:sldIdLst>
   <p:sldSz cx="12192000" cy="6858000"/>
   <p:notesSz cx="6858000" cy="9144000"/>
@@ -113,13 +116,18 @@
       </a:defRPr>
     </a:lvl9pPr>
   </p:defaultTextStyle>
+  <p:extLst>
+    <p:ext uri="{EFAFB233-063F-42B5-8137-9DF3F51BA10A}">
+      <p15:sldGuideLst xmlns:p15="http://schemas.microsoft.com/office/powerpoint/2012/main"/>
+    </p:ext>
+  </p:extLst>
 </p:presentation>
 </file>
 
 <file path=ppt/revisionInfo.xml><?xml version="1.0" encoding="utf-8"?>
 <p1510:revInfo xmlns:a="http://schemas.openxmlformats.org/drawingml/2006/main" xmlns:r="http://schemas.openxmlformats.org/officeDocument/2006/relationships" xmlns:p1510="http://schemas.microsoft.com/office/powerpoint/2015/10/main">
   <p1510:revLst>
-    <p1510:client id="{779DC206-8FD8-46FC-BF16-4ADCED029A8F}" v="24" dt="2022-05-26T00:27:41.922"/>
+    <p1510:client id="{779DC206-8FD8-46FC-BF16-4ADCED029A8F}" v="124" dt="2022-05-30T23:19:23.003"/>
   </p1510:revLst>
 </p1510:revInfo>
 </file>
@@ -128,17 +136,25 @@
 <pc:chgInfo xmlns:a="http://schemas.openxmlformats.org/drawingml/2006/main" xmlns:r="http://schemas.openxmlformats.org/officeDocument/2006/relationships" xmlns:ac="http://schemas.microsoft.com/office/drawing/2013/main/command" xmlns:pc="http://schemas.microsoft.com/office/powerpoint/2013/main/command">
   <pc:docChgLst>
     <pc:chgData name="Jose Giron" userId="2eec2bfe826d1e24" providerId="LiveId" clId="{779DC206-8FD8-46FC-BF16-4ADCED029A8F}"/>
-    <pc:docChg chg="undo custSel modSld">
-      <pc:chgData name="Jose Giron" userId="2eec2bfe826d1e24" providerId="LiveId" clId="{779DC206-8FD8-46FC-BF16-4ADCED029A8F}" dt="2022-05-26T00:31:49.590" v="589"/>
+    <pc:docChg chg="undo custSel addSld delSld modSld">
+      <pc:chgData name="Jose Giron" userId="2eec2bfe826d1e24" providerId="LiveId" clId="{779DC206-8FD8-46FC-BF16-4ADCED029A8F}" dt="2022-05-30T23:21:16.056" v="1502" actId="1076"/>
       <pc:docMkLst>
         <pc:docMk/>
       </pc:docMkLst>
       <pc:sldChg chg="addSp modSp mod modNotesTx">
-        <pc:chgData name="Jose Giron" userId="2eec2bfe826d1e24" providerId="LiveId" clId="{779DC206-8FD8-46FC-BF16-4ADCED029A8F}" dt="2022-05-25T23:42:21.728" v="21"/>
+        <pc:chgData name="Jose Giron" userId="2eec2bfe826d1e24" providerId="LiveId" clId="{779DC206-8FD8-46FC-BF16-4ADCED029A8F}" dt="2022-05-30T23:02:48.482" v="1084" actId="1582"/>
         <pc:sldMkLst>
           <pc:docMk/>
           <pc:sldMk cId="2635098363" sldId="257"/>
         </pc:sldMkLst>
+        <pc:spChg chg="mod">
+          <ac:chgData name="Jose Giron" userId="2eec2bfe826d1e24" providerId="LiveId" clId="{779DC206-8FD8-46FC-BF16-4ADCED029A8F}" dt="2022-05-30T23:02:48.482" v="1084" actId="1582"/>
+          <ac:spMkLst>
+            <pc:docMk/>
+            <pc:sldMk cId="2635098363" sldId="257"/>
+            <ac:spMk id="4" creationId="{5A7A049A-02BB-7905-AD0F-3896DCFCDE78}"/>
+          </ac:spMkLst>
+        </pc:spChg>
         <pc:picChg chg="add mod modCrop">
           <ac:chgData name="Jose Giron" userId="2eec2bfe826d1e24" providerId="LiveId" clId="{779DC206-8FD8-46FC-BF16-4ADCED029A8F}" dt="2022-05-25T23:36:43.996" v="12" actId="1076"/>
           <ac:picMkLst>
@@ -149,7 +165,7 @@
         </pc:picChg>
       </pc:sldChg>
       <pc:sldChg chg="addSp delSp modSp mod modNotesTx">
-        <pc:chgData name="Jose Giron" userId="2eec2bfe826d1e24" providerId="LiveId" clId="{779DC206-8FD8-46FC-BF16-4ADCED029A8F}" dt="2022-05-25T23:51:24.628" v="284" actId="207"/>
+        <pc:chgData name="Jose Giron" userId="2eec2bfe826d1e24" providerId="LiveId" clId="{779DC206-8FD8-46FC-BF16-4ADCED029A8F}" dt="2022-05-30T23:03:02.764" v="1085" actId="108"/>
         <pc:sldMkLst>
           <pc:docMk/>
           <pc:sldMk cId="2755628348" sldId="258"/>
@@ -170,6 +186,14 @@
             <ac:spMk id="3" creationId="{DCF4C9B5-FCD9-3594-27C8-BEC542C34915}"/>
           </ac:spMkLst>
         </pc:spChg>
+        <pc:spChg chg="mod">
+          <ac:chgData name="Jose Giron" userId="2eec2bfe826d1e24" providerId="LiveId" clId="{779DC206-8FD8-46FC-BF16-4ADCED029A8F}" dt="2022-05-30T23:03:02.764" v="1085" actId="108"/>
+          <ac:spMkLst>
+            <pc:docMk/>
+            <pc:sldMk cId="2755628348" sldId="258"/>
+            <ac:spMk id="4" creationId="{5A7A049A-02BB-7905-AD0F-3896DCFCDE78}"/>
+          </ac:spMkLst>
+        </pc:spChg>
         <pc:spChg chg="add del">
           <ac:chgData name="Jose Giron" userId="2eec2bfe826d1e24" providerId="LiveId" clId="{779DC206-8FD8-46FC-BF16-4ADCED029A8F}" dt="2022-05-25T23:49:28.994" v="276"/>
           <ac:spMkLst>
@@ -179,8 +203,39 @@
           </ac:spMkLst>
         </pc:spChg>
       </pc:sldChg>
-      <pc:sldChg chg="addSp delSp modSp mod">
-        <pc:chgData name="Jose Giron" userId="2eec2bfe826d1e24" providerId="LiveId" clId="{779DC206-8FD8-46FC-BF16-4ADCED029A8F}" dt="2022-05-26T00:31:49.590" v="589"/>
+      <pc:sldChg chg="modSp mod">
+        <pc:chgData name="Jose Giron" userId="2eec2bfe826d1e24" providerId="LiveId" clId="{779DC206-8FD8-46FC-BF16-4ADCED029A8F}" dt="2022-05-30T23:09:12.340" v="1111" actId="693"/>
+        <pc:sldMkLst>
+          <pc:docMk/>
+          <pc:sldMk cId="3715975995" sldId="259"/>
+        </pc:sldMkLst>
+        <pc:spChg chg="mod">
+          <ac:chgData name="Jose Giron" userId="2eec2bfe826d1e24" providerId="LiveId" clId="{779DC206-8FD8-46FC-BF16-4ADCED029A8F}" dt="2022-05-30T22:45:17.484" v="746" actId="113"/>
+          <ac:spMkLst>
+            <pc:docMk/>
+            <pc:sldMk cId="3715975995" sldId="259"/>
+            <ac:spMk id="2" creationId="{9917D819-851E-FA77-E701-00C35E33ACA8}"/>
+          </ac:spMkLst>
+        </pc:spChg>
+        <pc:spChg chg="mod">
+          <ac:chgData name="Jose Giron" userId="2eec2bfe826d1e24" providerId="LiveId" clId="{779DC206-8FD8-46FC-BF16-4ADCED029A8F}" dt="2022-05-30T22:49:44.334" v="931" actId="207"/>
+          <ac:spMkLst>
+            <pc:docMk/>
+            <pc:sldMk cId="3715975995" sldId="259"/>
+            <ac:spMk id="3" creationId="{DCF4C9B5-FCD9-3594-27C8-BEC542C34915}"/>
+          </ac:spMkLst>
+        </pc:spChg>
+        <pc:spChg chg="mod">
+          <ac:chgData name="Jose Giron" userId="2eec2bfe826d1e24" providerId="LiveId" clId="{779DC206-8FD8-46FC-BF16-4ADCED029A8F}" dt="2022-05-30T23:09:12.340" v="1111" actId="693"/>
+          <ac:spMkLst>
+            <pc:docMk/>
+            <pc:sldMk cId="3715975995" sldId="259"/>
+            <ac:spMk id="4" creationId="{5A7A049A-02BB-7905-AD0F-3896DCFCDE78}"/>
+          </ac:spMkLst>
+        </pc:spChg>
+      </pc:sldChg>
+      <pc:sldChg chg="addSp delSp modSp mod modNotesTx">
+        <pc:chgData name="Jose Giron" userId="2eec2bfe826d1e24" providerId="LiveId" clId="{779DC206-8FD8-46FC-BF16-4ADCED029A8F}" dt="2022-05-30T23:03:08.381" v="1087" actId="108"/>
         <pc:sldMkLst>
           <pc:docMk/>
           <pc:sldMk cId="876591877" sldId="260"/>
@@ -193,32 +248,88 @@
             <ac:spMk id="2" creationId="{9917D819-851E-FA77-E701-00C35E33ACA8}"/>
           </ac:spMkLst>
         </pc:spChg>
-        <pc:spChg chg="mod">
-          <ac:chgData name="Jose Giron" userId="2eec2bfe826d1e24" providerId="LiveId" clId="{779DC206-8FD8-46FC-BF16-4ADCED029A8F}" dt="2022-05-26T00:30:29.232" v="588" actId="20577"/>
+        <pc:spChg chg="del mod">
+          <ac:chgData name="Jose Giron" userId="2eec2bfe826d1e24" providerId="LiveId" clId="{779DC206-8FD8-46FC-BF16-4ADCED029A8F}" dt="2022-05-30T22:58:05.397" v="1069" actId="478"/>
           <ac:spMkLst>
             <pc:docMk/>
             <pc:sldMk cId="876591877" sldId="260"/>
             <ac:spMk id="3" creationId="{DCF4C9B5-FCD9-3594-27C8-BEC542C34915}"/>
           </ac:spMkLst>
         </pc:spChg>
-        <pc:cxnChg chg="add mod">
-          <ac:chgData name="Jose Giron" userId="2eec2bfe826d1e24" providerId="LiveId" clId="{779DC206-8FD8-46FC-BF16-4ADCED029A8F}" dt="2022-05-26T00:28:10.681" v="555" actId="1076"/>
+        <pc:spChg chg="mod">
+          <ac:chgData name="Jose Giron" userId="2eec2bfe826d1e24" providerId="LiveId" clId="{779DC206-8FD8-46FC-BF16-4ADCED029A8F}" dt="2022-05-30T23:03:08.381" v="1087" actId="108"/>
+          <ac:spMkLst>
+            <pc:docMk/>
+            <pc:sldMk cId="876591877" sldId="260"/>
+            <ac:spMk id="4" creationId="{5A7A049A-02BB-7905-AD0F-3896DCFCDE78}"/>
+          </ac:spMkLst>
+        </pc:spChg>
+        <pc:spChg chg="add del mod ord">
+          <ac:chgData name="Jose Giron" userId="2eec2bfe826d1e24" providerId="LiveId" clId="{779DC206-8FD8-46FC-BF16-4ADCED029A8F}" dt="2022-05-30T22:31:05.853" v="663" actId="478"/>
+          <ac:spMkLst>
+            <pc:docMk/>
+            <pc:sldMk cId="876591877" sldId="260"/>
+            <ac:spMk id="6" creationId="{C97ED18B-1DDD-3BC5-8AC7-37CC9831B8A2}"/>
+          </ac:spMkLst>
+        </pc:spChg>
+        <pc:picChg chg="add mod">
+          <ac:chgData name="Jose Giron" userId="2eec2bfe826d1e24" providerId="LiveId" clId="{779DC206-8FD8-46FC-BF16-4ADCED029A8F}" dt="2022-05-30T22:58:10.449" v="1071" actId="1076"/>
+          <ac:picMkLst>
+            <pc:docMk/>
+            <pc:sldMk cId="876591877" sldId="260"/>
+            <ac:picMk id="9" creationId="{F40D997B-E81D-11A9-B0BB-814A6CA6512B}"/>
+          </ac:picMkLst>
+        </pc:picChg>
+        <pc:picChg chg="add mod">
+          <ac:chgData name="Jose Giron" userId="2eec2bfe826d1e24" providerId="LiveId" clId="{779DC206-8FD8-46FC-BF16-4ADCED029A8F}" dt="2022-05-30T22:58:13.047" v="1072" actId="1076"/>
+          <ac:picMkLst>
+            <pc:docMk/>
+            <pc:sldMk cId="876591877" sldId="260"/>
+            <ac:picMk id="11" creationId="{A39E8161-43E8-004A-742D-3ECEEC6E4E91}"/>
+          </ac:picMkLst>
+        </pc:picChg>
+        <pc:picChg chg="add mod">
+          <ac:chgData name="Jose Giron" userId="2eec2bfe826d1e24" providerId="LiveId" clId="{779DC206-8FD8-46FC-BF16-4ADCED029A8F}" dt="2022-05-30T22:59:33.606" v="1083" actId="1076"/>
+          <ac:picMkLst>
+            <pc:docMk/>
+            <pc:sldMk cId="876591877" sldId="260"/>
+            <ac:picMk id="14" creationId="{CEE52565-88C0-BCDE-EE4B-234F030B8C25}"/>
+          </ac:picMkLst>
+        </pc:picChg>
+        <pc:picChg chg="add del mod">
+          <ac:chgData name="Jose Giron" userId="2eec2bfe826d1e24" providerId="LiveId" clId="{779DC206-8FD8-46FC-BF16-4ADCED029A8F}" dt="2022-05-30T22:23:18.830" v="592"/>
+          <ac:picMkLst>
+            <pc:docMk/>
+            <pc:sldMk cId="876591877" sldId="260"/>
+            <ac:picMk id="1026" creationId="{A6F2CC8D-7D37-591A-B67E-5483A3B2BBFC}"/>
+          </ac:picMkLst>
+        </pc:picChg>
+        <pc:picChg chg="add del mod">
+          <ac:chgData name="Jose Giron" userId="2eec2bfe826d1e24" providerId="LiveId" clId="{779DC206-8FD8-46FC-BF16-4ADCED029A8F}" dt="2022-05-30T22:31:05.244" v="662" actId="478"/>
+          <ac:picMkLst>
+            <pc:docMk/>
+            <pc:sldMk cId="876591877" sldId="260"/>
+            <ac:picMk id="1028" creationId="{6ECE745A-1888-C12B-57A8-280874F6C579}"/>
+          </ac:picMkLst>
+        </pc:picChg>
+        <pc:cxnChg chg="add del mod">
+          <ac:chgData name="Jose Giron" userId="2eec2bfe826d1e24" providerId="LiveId" clId="{779DC206-8FD8-46FC-BF16-4ADCED029A8F}" dt="2022-05-30T22:58:03.078" v="1067" actId="478"/>
           <ac:cxnSpMkLst>
             <pc:docMk/>
             <pc:sldMk cId="876591877" sldId="260"/>
             <ac:cxnSpMk id="5" creationId="{C063E93A-3545-6FF4-F98E-467BAFC29429}"/>
           </ac:cxnSpMkLst>
         </pc:cxnChg>
-        <pc:cxnChg chg="add mod">
-          <ac:chgData name="Jose Giron" userId="2eec2bfe826d1e24" providerId="LiveId" clId="{779DC206-8FD8-46FC-BF16-4ADCED029A8F}" dt="2022-05-26T00:27:13.195" v="550" actId="14100"/>
+        <pc:cxnChg chg="add del mod">
+          <ac:chgData name="Jose Giron" userId="2eec2bfe826d1e24" providerId="LiveId" clId="{779DC206-8FD8-46FC-BF16-4ADCED029A8F}" dt="2022-05-30T22:58:02.471" v="1066" actId="478"/>
           <ac:cxnSpMkLst>
             <pc:docMk/>
             <pc:sldMk cId="876591877" sldId="260"/>
             <ac:cxnSpMk id="7" creationId="{080E6CAD-737A-7DF0-3AB9-BB77AC9F809E}"/>
           </ac:cxnSpMkLst>
         </pc:cxnChg>
-        <pc:cxnChg chg="add mod">
-          <ac:chgData name="Jose Giron" userId="2eec2bfe826d1e24" providerId="LiveId" clId="{779DC206-8FD8-46FC-BF16-4ADCED029A8F}" dt="2022-05-26T00:27:50.392" v="554" actId="14100"/>
+        <pc:cxnChg chg="add del mod">
+          <ac:chgData name="Jose Giron" userId="2eec2bfe826d1e24" providerId="LiveId" clId="{779DC206-8FD8-46FC-BF16-4ADCED029A8F}" dt="2022-05-30T22:58:01.702" v="1065" actId="478"/>
           <ac:cxnSpMkLst>
             <pc:docMk/>
             <pc:sldMk cId="876591877" sldId="260"/>
@@ -241,8 +352,8 @@
             <ac:cxnSpMk id="22" creationId="{301FEE5D-9992-85D7-CC9C-11ACC6494C23}"/>
           </ac:cxnSpMkLst>
         </pc:cxnChg>
-        <pc:cxnChg chg="add mod">
-          <ac:chgData name="Jose Giron" userId="2eec2bfe826d1e24" providerId="LiveId" clId="{779DC206-8FD8-46FC-BF16-4ADCED029A8F}" dt="2022-05-26T00:30:25.574" v="587" actId="14100"/>
+        <pc:cxnChg chg="add del mod">
+          <ac:chgData name="Jose Giron" userId="2eec2bfe826d1e24" providerId="LiveId" clId="{779DC206-8FD8-46FC-BF16-4ADCED029A8F}" dt="2022-05-30T22:58:03.668" v="1068" actId="478"/>
           <ac:cxnSpMkLst>
             <pc:docMk/>
             <pc:sldMk cId="876591877" sldId="260"/>
@@ -250,8 +361,8 @@
           </ac:cxnSpMkLst>
         </pc:cxnChg>
       </pc:sldChg>
-      <pc:sldChg chg="addSp delSp modSp mod setBg">
-        <pc:chgData name="Jose Giron" userId="2eec2bfe826d1e24" providerId="LiveId" clId="{779DC206-8FD8-46FC-BF16-4ADCED029A8F}" dt="2022-05-26T00:24:45.006" v="517" actId="14100"/>
+      <pc:sldChg chg="addSp delSp modSp mod setBg modNotesTx">
+        <pc:chgData name="Jose Giron" userId="2eec2bfe826d1e24" providerId="LiveId" clId="{779DC206-8FD8-46FC-BF16-4ADCED029A8F}" dt="2022-05-30T23:03:05.241" v="1086" actId="108"/>
         <pc:sldMkLst>
           <pc:docMk/>
           <pc:sldMk cId="2220655093" sldId="261"/>
@@ -265,11 +376,19 @@
           </ac:spMkLst>
         </pc:spChg>
         <pc:spChg chg="add del mod">
-          <ac:chgData name="Jose Giron" userId="2eec2bfe826d1e24" providerId="LiveId" clId="{779DC206-8FD8-46FC-BF16-4ADCED029A8F}" dt="2022-05-26T00:24:38.852" v="516" actId="20577"/>
+          <ac:chgData name="Jose Giron" userId="2eec2bfe826d1e24" providerId="LiveId" clId="{779DC206-8FD8-46FC-BF16-4ADCED029A8F}" dt="2022-05-30T22:57:03.750" v="1054" actId="20577"/>
           <ac:spMkLst>
             <pc:docMk/>
             <pc:sldMk cId="2220655093" sldId="261"/>
             <ac:spMk id="3" creationId="{DCF4C9B5-FCD9-3594-27C8-BEC542C34915}"/>
+          </ac:spMkLst>
+        </pc:spChg>
+        <pc:spChg chg="mod">
+          <ac:chgData name="Jose Giron" userId="2eec2bfe826d1e24" providerId="LiveId" clId="{779DC206-8FD8-46FC-BF16-4ADCED029A8F}" dt="2022-05-30T23:03:05.241" v="1086" actId="108"/>
+          <ac:spMkLst>
+            <pc:docMk/>
+            <pc:sldMk cId="2220655093" sldId="261"/>
+            <ac:spMk id="4" creationId="{5A7A049A-02BB-7905-AD0F-3896DCFCDE78}"/>
           </ac:spMkLst>
         </pc:spChg>
         <pc:spChg chg="add del mod">
@@ -288,16 +407,40 @@
             <ac:spMk id="6" creationId="{8984AE10-9C21-F843-102D-0AB7C2330736}"/>
           </ac:spMkLst>
         </pc:spChg>
-        <pc:cxnChg chg="add mod">
-          <ac:chgData name="Jose Giron" userId="2eec2bfe826d1e24" providerId="LiveId" clId="{779DC206-8FD8-46FC-BF16-4ADCED029A8F}" dt="2022-05-26T00:23:19.451" v="488" actId="14100"/>
+        <pc:graphicFrameChg chg="add del mod modGraphic">
+          <ac:chgData name="Jose Giron" userId="2eec2bfe826d1e24" providerId="LiveId" clId="{779DC206-8FD8-46FC-BF16-4ADCED029A8F}" dt="2022-05-30T22:55:38.048" v="1015" actId="21"/>
+          <ac:graphicFrameMkLst>
+            <pc:docMk/>
+            <pc:sldMk cId="2220655093" sldId="261"/>
+            <ac:graphicFrameMk id="5" creationId="{CC223F8D-EB9D-EC41-F3F7-C373548179E9}"/>
+          </ac:graphicFrameMkLst>
+        </pc:graphicFrameChg>
+        <pc:graphicFrameChg chg="add del mod">
+          <ac:chgData name="Jose Giron" userId="2eec2bfe826d1e24" providerId="LiveId" clId="{779DC206-8FD8-46FC-BF16-4ADCED029A8F}" dt="2022-05-30T22:55:40.307" v="1017"/>
+          <ac:graphicFrameMkLst>
+            <pc:docMk/>
+            <pc:sldMk cId="2220655093" sldId="261"/>
+            <ac:graphicFrameMk id="11" creationId="{CD786030-AA6D-9140-D7EE-B36E56CCDFCD}"/>
+          </ac:graphicFrameMkLst>
+        </pc:graphicFrameChg>
+        <pc:graphicFrameChg chg="add del mod">
+          <ac:chgData name="Jose Giron" userId="2eec2bfe826d1e24" providerId="LiveId" clId="{779DC206-8FD8-46FC-BF16-4ADCED029A8F}" dt="2022-05-30T22:55:42.557" v="1021"/>
+          <ac:graphicFrameMkLst>
+            <pc:docMk/>
+            <pc:sldMk cId="2220655093" sldId="261"/>
+            <ac:graphicFrameMk id="12" creationId="{BE316605-81B5-3308-50F4-B5CFFC9C79EE}"/>
+          </ac:graphicFrameMkLst>
+        </pc:graphicFrameChg>
+        <pc:cxnChg chg="add del mod">
+          <ac:chgData name="Jose Giron" userId="2eec2bfe826d1e24" providerId="LiveId" clId="{779DC206-8FD8-46FC-BF16-4ADCED029A8F}" dt="2022-05-30T22:31:30.068" v="665" actId="478"/>
           <ac:cxnSpMkLst>
             <pc:docMk/>
             <pc:sldMk cId="2220655093" sldId="261"/>
             <ac:cxnSpMk id="8" creationId="{28B8FF06-2289-8E23-8E52-8A9DA3BCAEC1}"/>
           </ac:cxnSpMkLst>
         </pc:cxnChg>
-        <pc:cxnChg chg="add mod">
-          <ac:chgData name="Jose Giron" userId="2eec2bfe826d1e24" providerId="LiveId" clId="{779DC206-8FD8-46FC-BF16-4ADCED029A8F}" dt="2022-05-26T00:23:05.507" v="487" actId="14100"/>
+        <pc:cxnChg chg="add del mod">
+          <ac:chgData name="Jose Giron" userId="2eec2bfe826d1e24" providerId="LiveId" clId="{779DC206-8FD8-46FC-BF16-4ADCED029A8F}" dt="2022-05-30T22:31:31.375" v="666" actId="478"/>
           <ac:cxnSpMkLst>
             <pc:docMk/>
             <pc:sldMk cId="2220655093" sldId="261"/>
@@ -305,7 +448,7 @@
           </ac:cxnSpMkLst>
         </pc:cxnChg>
         <pc:cxnChg chg="add mod">
-          <ac:chgData name="Jose Giron" userId="2eec2bfe826d1e24" providerId="LiveId" clId="{779DC206-8FD8-46FC-BF16-4ADCED029A8F}" dt="2022-05-26T00:24:11.158" v="507" actId="1076"/>
+          <ac:chgData name="Jose Giron" userId="2eec2bfe826d1e24" providerId="LiveId" clId="{779DC206-8FD8-46FC-BF16-4ADCED029A8F}" dt="2022-05-30T22:31:41.492" v="671" actId="1076"/>
           <ac:cxnSpMkLst>
             <pc:docMk/>
             <pc:sldMk cId="2220655093" sldId="261"/>
@@ -313,7 +456,7 @@
           </ac:cxnSpMkLst>
         </pc:cxnChg>
         <pc:cxnChg chg="add mod">
-          <ac:chgData name="Jose Giron" userId="2eec2bfe826d1e24" providerId="LiveId" clId="{779DC206-8FD8-46FC-BF16-4ADCED029A8F}" dt="2022-05-26T00:24:32.213" v="515" actId="14100"/>
+          <ac:chgData name="Jose Giron" userId="2eec2bfe826d1e24" providerId="LiveId" clId="{779DC206-8FD8-46FC-BF16-4ADCED029A8F}" dt="2022-05-30T22:31:46.010" v="673" actId="1076"/>
           <ac:cxnSpMkLst>
             <pc:docMk/>
             <pc:sldMk cId="2220655093" sldId="261"/>
@@ -321,13 +464,238 @@
           </ac:cxnSpMkLst>
         </pc:cxnChg>
         <pc:cxnChg chg="add mod">
-          <ac:chgData name="Jose Giron" userId="2eec2bfe826d1e24" providerId="LiveId" clId="{779DC206-8FD8-46FC-BF16-4ADCED029A8F}" dt="2022-05-26T00:24:45.006" v="517" actId="14100"/>
+          <ac:chgData name="Jose Giron" userId="2eec2bfe826d1e24" providerId="LiveId" clId="{779DC206-8FD8-46FC-BF16-4ADCED029A8F}" dt="2022-05-30T22:31:43.497" v="672" actId="1076"/>
           <ac:cxnSpMkLst>
             <pc:docMk/>
             <pc:sldMk cId="2220655093" sldId="261"/>
             <ac:cxnSpMk id="17" creationId="{DDEC25DC-853D-FF4A-CE5E-F1A71F9E8583}"/>
           </ac:cxnSpMkLst>
         </pc:cxnChg>
+      </pc:sldChg>
+      <pc:sldChg chg="addSp delSp modSp mod modNotesTx">
+        <pc:chgData name="Jose Giron" userId="2eec2bfe826d1e24" providerId="LiveId" clId="{779DC206-8FD8-46FC-BF16-4ADCED029A8F}" dt="2022-05-30T23:09:33.922" v="1112" actId="693"/>
+        <pc:sldMkLst>
+          <pc:docMk/>
+          <pc:sldMk cId="1480956492" sldId="262"/>
+        </pc:sldMkLst>
+        <pc:spChg chg="mod">
+          <ac:chgData name="Jose Giron" userId="2eec2bfe826d1e24" providerId="LiveId" clId="{779DC206-8FD8-46FC-BF16-4ADCED029A8F}" dt="2022-05-30T22:32:37.416" v="685" actId="20577"/>
+          <ac:spMkLst>
+            <pc:docMk/>
+            <pc:sldMk cId="1480956492" sldId="262"/>
+            <ac:spMk id="2" creationId="{9917D819-851E-FA77-E701-00C35E33ACA8}"/>
+          </ac:spMkLst>
+        </pc:spChg>
+        <pc:spChg chg="add del mod">
+          <ac:chgData name="Jose Giron" userId="2eec2bfe826d1e24" providerId="LiveId" clId="{779DC206-8FD8-46FC-BF16-4ADCED029A8F}" dt="2022-05-30T22:49:21.976" v="930" actId="12"/>
+          <ac:spMkLst>
+            <pc:docMk/>
+            <pc:sldMk cId="1480956492" sldId="262"/>
+            <ac:spMk id="3" creationId="{DCF4C9B5-FCD9-3594-27C8-BEC542C34915}"/>
+          </ac:spMkLst>
+        </pc:spChg>
+        <pc:spChg chg="mod">
+          <ac:chgData name="Jose Giron" userId="2eec2bfe826d1e24" providerId="LiveId" clId="{779DC206-8FD8-46FC-BF16-4ADCED029A8F}" dt="2022-05-30T23:09:33.922" v="1112" actId="693"/>
+          <ac:spMkLst>
+            <pc:docMk/>
+            <pc:sldMk cId="1480956492" sldId="262"/>
+            <ac:spMk id="4" creationId="{5A7A049A-02BB-7905-AD0F-3896DCFCDE78}"/>
+          </ac:spMkLst>
+        </pc:spChg>
+        <pc:spChg chg="add del mod">
+          <ac:chgData name="Jose Giron" userId="2eec2bfe826d1e24" providerId="LiveId" clId="{779DC206-8FD8-46FC-BF16-4ADCED029A8F}" dt="2022-05-30T22:40:47.725" v="687"/>
+          <ac:spMkLst>
+            <pc:docMk/>
+            <pc:sldMk cId="1480956492" sldId="262"/>
+            <ac:spMk id="5" creationId="{7EE30F28-543C-1B95-52E3-BDA86274B542}"/>
+          </ac:spMkLst>
+        </pc:spChg>
+      </pc:sldChg>
+      <pc:sldChg chg="add del">
+        <pc:chgData name="Jose Giron" userId="2eec2bfe826d1e24" providerId="LiveId" clId="{779DC206-8FD8-46FC-BF16-4ADCED029A8F}" dt="2022-05-30T22:58:51.533" v="1077" actId="2696"/>
+        <pc:sldMkLst>
+          <pc:docMk/>
+          <pc:sldMk cId="879993880" sldId="263"/>
+        </pc:sldMkLst>
+      </pc:sldChg>
+      <pc:sldChg chg="modSp add mod setBg">
+        <pc:chgData name="Jose Giron" userId="2eec2bfe826d1e24" providerId="LiveId" clId="{779DC206-8FD8-46FC-BF16-4ADCED029A8F}" dt="2022-05-30T23:19:22.015" v="1470"/>
+        <pc:sldMkLst>
+          <pc:docMk/>
+          <pc:sldMk cId="3901861615" sldId="264"/>
+        </pc:sldMkLst>
+        <pc:spChg chg="mod">
+          <ac:chgData name="Jose Giron" userId="2eec2bfe826d1e24" providerId="LiveId" clId="{779DC206-8FD8-46FC-BF16-4ADCED029A8F}" dt="2022-05-30T23:19:22.015" v="1470"/>
+          <ac:spMkLst>
+            <pc:docMk/>
+            <pc:sldMk cId="3901861615" sldId="264"/>
+            <ac:spMk id="2" creationId="{9917D819-851E-FA77-E701-00C35E33ACA8}"/>
+          </ac:spMkLst>
+        </pc:spChg>
+        <pc:spChg chg="mod">
+          <ac:chgData name="Jose Giron" userId="2eec2bfe826d1e24" providerId="LiveId" clId="{779DC206-8FD8-46FC-BF16-4ADCED029A8F}" dt="2022-05-30T23:19:22.015" v="1470"/>
+          <ac:spMkLst>
+            <pc:docMk/>
+            <pc:sldMk cId="3901861615" sldId="264"/>
+            <ac:spMk id="3" creationId="{DCF4C9B5-FCD9-3594-27C8-BEC542C34915}"/>
+          </ac:spMkLst>
+        </pc:spChg>
+        <pc:spChg chg="mod">
+          <ac:chgData name="Jose Giron" userId="2eec2bfe826d1e24" providerId="LiveId" clId="{779DC206-8FD8-46FC-BF16-4ADCED029A8F}" dt="2022-05-30T23:09:56.533" v="1113" actId="14861"/>
+          <ac:spMkLst>
+            <pc:docMk/>
+            <pc:sldMk cId="3901861615" sldId="264"/>
+            <ac:spMk id="4" creationId="{5A7A049A-02BB-7905-AD0F-3896DCFCDE78}"/>
+          </ac:spMkLst>
+        </pc:spChg>
+      </pc:sldChg>
+      <pc:sldChg chg="add del">
+        <pc:chgData name="Jose Giron" userId="2eec2bfe826d1e24" providerId="LiveId" clId="{779DC206-8FD8-46FC-BF16-4ADCED029A8F}" dt="2022-05-30T23:07:56.890" v="1107" actId="47"/>
+        <pc:sldMkLst>
+          <pc:docMk/>
+          <pc:sldMk cId="1176888810" sldId="265"/>
+        </pc:sldMkLst>
+      </pc:sldChg>
+      <pc:sldChg chg="add del">
+        <pc:chgData name="Jose Giron" userId="2eec2bfe826d1e24" providerId="LiveId" clId="{779DC206-8FD8-46FC-BF16-4ADCED029A8F}" dt="2022-05-30T23:07:56.094" v="1106" actId="47"/>
+        <pc:sldMkLst>
+          <pc:docMk/>
+          <pc:sldMk cId="2429674143" sldId="266"/>
+        </pc:sldMkLst>
+      </pc:sldChg>
+      <pc:sldChg chg="addSp delSp modSp add mod setBg modNotesTx">
+        <pc:chgData name="Jose Giron" userId="2eec2bfe826d1e24" providerId="LiveId" clId="{779DC206-8FD8-46FC-BF16-4ADCED029A8F}" dt="2022-05-30T23:20:58.267" v="1496" actId="732"/>
+        <pc:sldMkLst>
+          <pc:docMk/>
+          <pc:sldMk cId="2597589618" sldId="267"/>
+        </pc:sldMkLst>
+        <pc:spChg chg="mod">
+          <ac:chgData name="Jose Giron" userId="2eec2bfe826d1e24" providerId="LiveId" clId="{779DC206-8FD8-46FC-BF16-4ADCED029A8F}" dt="2022-05-30T23:20:28.209" v="1488" actId="1076"/>
+          <ac:spMkLst>
+            <pc:docMk/>
+            <pc:sldMk cId="2597589618" sldId="267"/>
+            <ac:spMk id="2" creationId="{9917D819-851E-FA77-E701-00C35E33ACA8}"/>
+          </ac:spMkLst>
+        </pc:spChg>
+        <pc:spChg chg="del mod">
+          <ac:chgData name="Jose Giron" userId="2eec2bfe826d1e24" providerId="LiveId" clId="{779DC206-8FD8-46FC-BF16-4ADCED029A8F}" dt="2022-05-30T23:14:56.119" v="1399" actId="22"/>
+          <ac:spMkLst>
+            <pc:docMk/>
+            <pc:sldMk cId="2597589618" sldId="267"/>
+            <ac:spMk id="3" creationId="{DCF4C9B5-FCD9-3594-27C8-BEC542C34915}"/>
+          </ac:spMkLst>
+        </pc:spChg>
+        <pc:picChg chg="add mod ord modCrop">
+          <ac:chgData name="Jose Giron" userId="2eec2bfe826d1e24" providerId="LiveId" clId="{779DC206-8FD8-46FC-BF16-4ADCED029A8F}" dt="2022-05-30T23:20:44.548" v="1493" actId="14100"/>
+          <ac:picMkLst>
+            <pc:docMk/>
+            <pc:sldMk cId="2597589618" sldId="267"/>
+            <ac:picMk id="6" creationId="{01C2B23A-7610-1DB2-6236-0F2AE64EAC19}"/>
+          </ac:picMkLst>
+        </pc:picChg>
+        <pc:picChg chg="add mod modCrop">
+          <ac:chgData name="Jose Giron" userId="2eec2bfe826d1e24" providerId="LiveId" clId="{779DC206-8FD8-46FC-BF16-4ADCED029A8F}" dt="2022-05-30T23:20:58.267" v="1496" actId="732"/>
+          <ac:picMkLst>
+            <pc:docMk/>
+            <pc:sldMk cId="2597589618" sldId="267"/>
+            <ac:picMk id="8" creationId="{BA352696-6AAE-2708-7BCE-BE7160F44F4D}"/>
+          </ac:picMkLst>
+        </pc:picChg>
+        <pc:picChg chg="add del mod modCrop">
+          <ac:chgData name="Jose Giron" userId="2eec2bfe826d1e24" providerId="LiveId" clId="{779DC206-8FD8-46FC-BF16-4ADCED029A8F}" dt="2022-05-30T23:20:17.654" v="1484" actId="478"/>
+          <ac:picMkLst>
+            <pc:docMk/>
+            <pc:sldMk cId="2597589618" sldId="267"/>
+            <ac:picMk id="10" creationId="{B977914C-501D-AFB9-29B7-9ED1512E5EB1}"/>
+          </ac:picMkLst>
+        </pc:picChg>
+        <pc:picChg chg="add del mod modCrop">
+          <ac:chgData name="Jose Giron" userId="2eec2bfe826d1e24" providerId="LiveId" clId="{779DC206-8FD8-46FC-BF16-4ADCED029A8F}" dt="2022-05-30T23:20:18.095" v="1485" actId="478"/>
+          <ac:picMkLst>
+            <pc:docMk/>
+            <pc:sldMk cId="2597589618" sldId="267"/>
+            <ac:picMk id="12" creationId="{86F480AA-9153-F494-89AD-A818655CFB2B}"/>
+          </ac:picMkLst>
+        </pc:picChg>
+        <pc:picChg chg="add del mod modCrop">
+          <ac:chgData name="Jose Giron" userId="2eec2bfe826d1e24" providerId="LiveId" clId="{779DC206-8FD8-46FC-BF16-4ADCED029A8F}" dt="2022-05-30T23:19:34.606" v="1474" actId="478"/>
+          <ac:picMkLst>
+            <pc:docMk/>
+            <pc:sldMk cId="2597589618" sldId="267"/>
+            <ac:picMk id="14" creationId="{C0D1C118-D26B-AA3A-B8EB-4713F5B7E7E6}"/>
+          </ac:picMkLst>
+        </pc:picChg>
+      </pc:sldChg>
+      <pc:sldChg chg="addSp delSp modSp add mod">
+        <pc:chgData name="Jose Giron" userId="2eec2bfe826d1e24" providerId="LiveId" clId="{779DC206-8FD8-46FC-BF16-4ADCED029A8F}" dt="2022-05-30T23:21:16.056" v="1502" actId="1076"/>
+        <pc:sldMkLst>
+          <pc:docMk/>
+          <pc:sldMk cId="2915599507" sldId="268"/>
+        </pc:sldMkLst>
+        <pc:spChg chg="add del">
+          <ac:chgData name="Jose Giron" userId="2eec2bfe826d1e24" providerId="LiveId" clId="{779DC206-8FD8-46FC-BF16-4ADCED029A8F}" dt="2022-05-30T23:19:11.674" v="1467" actId="478"/>
+          <ac:spMkLst>
+            <pc:docMk/>
+            <pc:sldMk cId="2915599507" sldId="268"/>
+            <ac:spMk id="4" creationId="{5A7A049A-02BB-7905-AD0F-3896DCFCDE78}"/>
+          </ac:spMkLst>
+        </pc:spChg>
+        <pc:spChg chg="add del mod">
+          <ac:chgData name="Jose Giron" userId="2eec2bfe826d1e24" providerId="LiveId" clId="{779DC206-8FD8-46FC-BF16-4ADCED029A8F}" dt="2022-05-30T23:19:14.041" v="1468" actId="478"/>
+          <ac:spMkLst>
+            <pc:docMk/>
+            <pc:sldMk cId="2915599507" sldId="268"/>
+            <ac:spMk id="9" creationId="{3CC8E9B0-B6C8-13F9-57DC-7C68CCE722A4}"/>
+          </ac:spMkLst>
+        </pc:spChg>
+        <pc:picChg chg="add mod">
+          <ac:chgData name="Jose Giron" userId="2eec2bfe826d1e24" providerId="LiveId" clId="{779DC206-8FD8-46FC-BF16-4ADCED029A8F}" dt="2022-05-30T23:21:16.056" v="1502" actId="1076"/>
+          <ac:picMkLst>
+            <pc:docMk/>
+            <pc:sldMk cId="2915599507" sldId="268"/>
+            <ac:picMk id="5" creationId="{14AC0B84-2396-E62C-9748-D55A02AE46D3}"/>
+          </ac:picMkLst>
+        </pc:picChg>
+        <pc:picChg chg="del">
+          <ac:chgData name="Jose Giron" userId="2eec2bfe826d1e24" providerId="LiveId" clId="{779DC206-8FD8-46FC-BF16-4ADCED029A8F}" dt="2022-05-30T23:19:03.486" v="1463" actId="478"/>
+          <ac:picMkLst>
+            <pc:docMk/>
+            <pc:sldMk cId="2915599507" sldId="268"/>
+            <ac:picMk id="6" creationId="{01C2B23A-7610-1DB2-6236-0F2AE64EAC19}"/>
+          </ac:picMkLst>
+        </pc:picChg>
+        <pc:picChg chg="del mod">
+          <ac:chgData name="Jose Giron" userId="2eec2bfe826d1e24" providerId="LiveId" clId="{779DC206-8FD8-46FC-BF16-4ADCED029A8F}" dt="2022-05-30T23:20:15.792" v="1483" actId="478"/>
+          <ac:picMkLst>
+            <pc:docMk/>
+            <pc:sldMk cId="2915599507" sldId="268"/>
+            <ac:picMk id="8" creationId="{BA352696-6AAE-2708-7BCE-BE7160F44F4D}"/>
+          </ac:picMkLst>
+        </pc:picChg>
+        <pc:picChg chg="mod">
+          <ac:chgData name="Jose Giron" userId="2eec2bfe826d1e24" providerId="LiveId" clId="{779DC206-8FD8-46FC-BF16-4ADCED029A8F}" dt="2022-05-30T23:21:03.225" v="1497" actId="1076"/>
+          <ac:picMkLst>
+            <pc:docMk/>
+            <pc:sldMk cId="2915599507" sldId="268"/>
+            <ac:picMk id="10" creationId="{B977914C-501D-AFB9-29B7-9ED1512E5EB1}"/>
+          </ac:picMkLst>
+        </pc:picChg>
+        <pc:picChg chg="mod">
+          <ac:chgData name="Jose Giron" userId="2eec2bfe826d1e24" providerId="LiveId" clId="{779DC206-8FD8-46FC-BF16-4ADCED029A8F}" dt="2022-05-30T23:21:05.258" v="1498" actId="1076"/>
+          <ac:picMkLst>
+            <pc:docMk/>
+            <pc:sldMk cId="2915599507" sldId="268"/>
+            <ac:picMk id="12" creationId="{86F480AA-9153-F494-89AD-A818655CFB2B}"/>
+          </ac:picMkLst>
+        </pc:picChg>
+        <pc:picChg chg="del">
+          <ac:chgData name="Jose Giron" userId="2eec2bfe826d1e24" providerId="LiveId" clId="{779DC206-8FD8-46FC-BF16-4ADCED029A8F}" dt="2022-05-30T23:18:55.670" v="1458" actId="478"/>
+          <ac:picMkLst>
+            <pc:docMk/>
+            <pc:sldMk cId="2915599507" sldId="268"/>
+            <ac:picMk id="14" creationId="{C0D1C118-D26B-AA3A-B8EB-4713F5B7E7E6}"/>
+          </ac:picMkLst>
+        </pc:picChg>
       </pc:sldChg>
     </pc:docChg>
   </pc:docChgLst>
@@ -416,7 +784,7 @@
           <a:p>
             <a:fld id="{E8E6A7E8-CE78-470E-9A07-74648486FD05}" type="datetimeFigureOut">
               <a:rPr lang="en-US" smtClean="0"/>
-              <a:t>5/25/2022</a:t>
+              <a:t>5/30/2022</a:t>
             </a:fld>
             <a:endParaRPr lang="en-US"/>
           </a:p>
@@ -917,6 +1285,22 @@
           <a:bodyPr/>
           <a:lstStyle/>
           <a:p>
+            <a:r>
+              <a:rPr lang="en-US" dirty="0"/>
+              <a:t>1 parameter. Applies the radius to each and every corner.</a:t>
+            </a:r>
+          </a:p>
+          <a:p>
+            <a:r>
+              <a:rPr lang="en-US" dirty="0"/>
+              <a:t>2 parameters: top-left + bottom-right and a top-right + bottom-left.</a:t>
+            </a:r>
+            <a:br>
+              <a:rPr lang="en-US" dirty="0"/>
+            </a:br>
+            <a:endParaRPr lang="en-US" dirty="0"/>
+          </a:p>
+          <a:p>
             <a:endParaRPr lang="en-US" dirty="0"/>
           </a:p>
         </p:txBody>
@@ -948,6 +1332,465 @@
     <p:extLst>
       <p:ext uri="{BB962C8B-B14F-4D97-AF65-F5344CB8AC3E}">
         <p14:creationId xmlns:p14="http://schemas.microsoft.com/office/powerpoint/2010/main" val="1214227049"/>
+      </p:ext>
+    </p:extLst>
+  </p:cSld>
+  <p:clrMapOvr>
+    <a:masterClrMapping/>
+  </p:clrMapOvr>
+</p:notes>
+</file>
+
+<file path=ppt/notesSlides/notesSlide4.xml><?xml version="1.0" encoding="utf-8"?>
+<p:notes xmlns:a="http://schemas.openxmlformats.org/drawingml/2006/main" xmlns:r="http://schemas.openxmlformats.org/officeDocument/2006/relationships" xmlns:p="http://schemas.openxmlformats.org/presentationml/2006/main">
+  <p:cSld>
+    <p:spTree>
+      <p:nvGrpSpPr>
+        <p:cNvPr id="1" name=""/>
+        <p:cNvGrpSpPr/>
+        <p:nvPr/>
+      </p:nvGrpSpPr>
+      <p:grpSpPr>
+        <a:xfrm>
+          <a:off x="0" y="0"/>
+          <a:ext cx="0" cy="0"/>
+          <a:chOff x="0" y="0"/>
+          <a:chExt cx="0" cy="0"/>
+        </a:xfrm>
+      </p:grpSpPr>
+      <p:sp>
+        <p:nvSpPr>
+          <p:cNvPr id="2" name="Slide Image Placeholder 1"/>
+          <p:cNvSpPr>
+            <a:spLocks noGrp="1" noRot="1" noChangeAspect="1"/>
+          </p:cNvSpPr>
+          <p:nvPr>
+            <p:ph type="sldImg"/>
+          </p:nvPr>
+        </p:nvSpPr>
+        <p:spPr/>
+      </p:sp>
+      <p:sp>
+        <p:nvSpPr>
+          <p:cNvPr id="3" name="Notes Placeholder 2"/>
+          <p:cNvSpPr>
+            <a:spLocks noGrp="1"/>
+          </p:cNvSpPr>
+          <p:nvPr>
+            <p:ph type="body" idx="1"/>
+          </p:nvPr>
+        </p:nvSpPr>
+        <p:spPr/>
+        <p:txBody>
+          <a:bodyPr/>
+          <a:lstStyle/>
+          <a:p>
+            <a:r>
+              <a:rPr lang="en-US" dirty="0"/>
+              <a:t>3 parameters: top-left, to top-right and bottom-left and to bottom-right. </a:t>
+            </a:r>
+            <a:br>
+              <a:rPr lang="en-US" dirty="0"/>
+            </a:br>
+            <a:r>
+              <a:rPr lang="en-US" dirty="0"/>
+              <a:t>4 parameters. Clockwise order, starting with top-left.</a:t>
+            </a:r>
+          </a:p>
+        </p:txBody>
+      </p:sp>
+      <p:sp>
+        <p:nvSpPr>
+          <p:cNvPr id="4" name="Slide Number Placeholder 3"/>
+          <p:cNvSpPr>
+            <a:spLocks noGrp="1"/>
+          </p:cNvSpPr>
+          <p:nvPr>
+            <p:ph type="sldNum" sz="quarter" idx="5"/>
+          </p:nvPr>
+        </p:nvSpPr>
+        <p:spPr/>
+        <p:txBody>
+          <a:bodyPr/>
+          <a:lstStyle/>
+          <a:p>
+            <a:fld id="{B550150B-B319-4329-8BD6-30423CB3C447}" type="slidenum">
+              <a:rPr lang="en-US" smtClean="0"/>
+              <a:t>5</a:t>
+            </a:fld>
+            <a:endParaRPr lang="en-US"/>
+          </a:p>
+        </p:txBody>
+      </p:sp>
+    </p:spTree>
+    <p:extLst>
+      <p:ext uri="{BB962C8B-B14F-4D97-AF65-F5344CB8AC3E}">
+        <p14:creationId xmlns:p14="http://schemas.microsoft.com/office/powerpoint/2010/main" val="643820856"/>
+      </p:ext>
+    </p:extLst>
+  </p:cSld>
+  <p:clrMapOvr>
+    <a:masterClrMapping/>
+  </p:clrMapOvr>
+</p:notes>
+</file>
+
+<file path=ppt/notesSlides/notesSlide5.xml><?xml version="1.0" encoding="utf-8"?>
+<p:notes xmlns:a="http://schemas.openxmlformats.org/drawingml/2006/main" xmlns:r="http://schemas.openxmlformats.org/officeDocument/2006/relationships" xmlns:p="http://schemas.openxmlformats.org/presentationml/2006/main">
+  <p:cSld>
+    <p:spTree>
+      <p:nvGrpSpPr>
+        <p:cNvPr id="1" name=""/>
+        <p:cNvGrpSpPr/>
+        <p:nvPr/>
+      </p:nvGrpSpPr>
+      <p:grpSpPr>
+        <a:xfrm>
+          <a:off x="0" y="0"/>
+          <a:ext cx="0" cy="0"/>
+          <a:chOff x="0" y="0"/>
+          <a:chExt cx="0" cy="0"/>
+        </a:xfrm>
+      </p:grpSpPr>
+      <p:sp>
+        <p:nvSpPr>
+          <p:cNvPr id="2" name="Slide Image Placeholder 1"/>
+          <p:cNvSpPr>
+            <a:spLocks noGrp="1" noRot="1" noChangeAspect="1"/>
+          </p:cNvSpPr>
+          <p:nvPr>
+            <p:ph type="sldImg"/>
+          </p:nvPr>
+        </p:nvSpPr>
+        <p:spPr/>
+      </p:sp>
+      <p:sp>
+        <p:nvSpPr>
+          <p:cNvPr id="3" name="Notes Placeholder 2"/>
+          <p:cNvSpPr>
+            <a:spLocks noGrp="1"/>
+          </p:cNvSpPr>
+          <p:nvPr>
+            <p:ph type="body" idx="1"/>
+          </p:nvPr>
+        </p:nvSpPr>
+        <p:spPr/>
+        <p:txBody>
+          <a:bodyPr/>
+          <a:lstStyle/>
+          <a:p>
+            <a:r>
+              <a:rPr lang="en-US" i="1" dirty="0">
+                <a:effectLst/>
+                <a:hlinkClick r:id="rId3"/>
+              </a:rPr>
+              <a:t>border-width</a:t>
+            </a:r>
+            <a:r>
+              <a:rPr lang="en-US" i="1" dirty="0">
+                <a:effectLst/>
+              </a:rPr>
+              <a:t> </a:t>
+            </a:r>
+            <a:r>
+              <a:rPr lang="en-US" dirty="0">
+                <a:effectLst/>
+              </a:rPr>
+              <a:t>Specifies the width of the border. Default value is "medium“</a:t>
+            </a:r>
+          </a:p>
+          <a:p>
+            <a:endParaRPr lang="en-US" dirty="0"/>
+          </a:p>
+        </p:txBody>
+      </p:sp>
+      <p:sp>
+        <p:nvSpPr>
+          <p:cNvPr id="4" name="Slide Number Placeholder 3"/>
+          <p:cNvSpPr>
+            <a:spLocks noGrp="1"/>
+          </p:cNvSpPr>
+          <p:nvPr>
+            <p:ph type="sldNum" sz="quarter" idx="5"/>
+          </p:nvPr>
+        </p:nvSpPr>
+        <p:spPr/>
+        <p:txBody>
+          <a:bodyPr/>
+          <a:lstStyle/>
+          <a:p>
+            <a:fld id="{B550150B-B319-4329-8BD6-30423CB3C447}" type="slidenum">
+              <a:rPr lang="en-US" smtClean="0"/>
+              <a:t>6</a:t>
+            </a:fld>
+            <a:endParaRPr lang="en-US"/>
+          </a:p>
+        </p:txBody>
+      </p:sp>
+    </p:spTree>
+    <p:extLst>
+      <p:ext uri="{BB962C8B-B14F-4D97-AF65-F5344CB8AC3E}">
+        <p14:creationId xmlns:p14="http://schemas.microsoft.com/office/powerpoint/2010/main" val="964882764"/>
+      </p:ext>
+    </p:extLst>
+  </p:cSld>
+  <p:clrMapOvr>
+    <a:masterClrMapping/>
+  </p:clrMapOvr>
+</p:notes>
+</file>
+
+<file path=ppt/notesSlides/notesSlide6.xml><?xml version="1.0" encoding="utf-8"?>
+<p:notes xmlns:a="http://schemas.openxmlformats.org/drawingml/2006/main" xmlns:r="http://schemas.openxmlformats.org/officeDocument/2006/relationships" xmlns:p="http://schemas.openxmlformats.org/presentationml/2006/main">
+  <p:cSld>
+    <p:spTree>
+      <p:nvGrpSpPr>
+        <p:cNvPr id="1" name=""/>
+        <p:cNvGrpSpPr/>
+        <p:nvPr/>
+      </p:nvGrpSpPr>
+      <p:grpSpPr>
+        <a:xfrm>
+          <a:off x="0" y="0"/>
+          <a:ext cx="0" cy="0"/>
+          <a:chOff x="0" y="0"/>
+          <a:chExt cx="0" cy="0"/>
+        </a:xfrm>
+      </p:grpSpPr>
+      <p:sp>
+        <p:nvSpPr>
+          <p:cNvPr id="2" name="Slide Image Placeholder 1"/>
+          <p:cNvSpPr>
+            <a:spLocks noGrp="1" noRot="1" noChangeAspect="1"/>
+          </p:cNvSpPr>
+          <p:nvPr>
+            <p:ph type="sldImg"/>
+          </p:nvPr>
+        </p:nvSpPr>
+        <p:spPr/>
+      </p:sp>
+      <p:sp>
+        <p:nvSpPr>
+          <p:cNvPr id="3" name="Notes Placeholder 2"/>
+          <p:cNvSpPr>
+            <a:spLocks noGrp="1"/>
+          </p:cNvSpPr>
+          <p:nvPr>
+            <p:ph type="body" idx="1"/>
+          </p:nvPr>
+        </p:nvSpPr>
+        <p:spPr/>
+        <p:txBody>
+          <a:bodyPr/>
+          <a:lstStyle/>
+          <a:p>
+            <a:r>
+              <a:rPr lang="en-US" b="0" i="0" dirty="0">
+                <a:solidFill>
+                  <a:srgbClr val="000000"/>
+                </a:solidFill>
+                <a:effectLst/>
+                <a:latin typeface="Verdana" panose="020B0604030504040204" pitchFamily="34" charset="0"/>
+              </a:rPr>
+              <a:t>In its simplest use, you only specify the horizontal shadow (2px) and the vertical shadow (2px): </a:t>
+            </a:r>
+            <a:br>
+              <a:rPr lang="en-US" b="0" i="0" dirty="0">
+                <a:solidFill>
+                  <a:srgbClr val="000000"/>
+                </a:solidFill>
+                <a:effectLst/>
+                <a:latin typeface="Verdana" panose="020B0604030504040204" pitchFamily="34" charset="0"/>
+              </a:rPr>
+            </a:br>
+            <a:r>
+              <a:rPr lang="en-US" b="0" i="0" dirty="0">
+                <a:solidFill>
+                  <a:srgbClr val="000000"/>
+                </a:solidFill>
+                <a:effectLst/>
+                <a:latin typeface="Verdana" panose="020B0604030504040204" pitchFamily="34" charset="0"/>
+              </a:rPr>
+              <a:t>Since for most of us English is not our native tongue let me bring to the table the meaning of offset: “</a:t>
+            </a:r>
+            <a:r>
+              <a:rPr lang="en-US" b="0" i="0" dirty="0">
+                <a:effectLst/>
+                <a:latin typeface="Roboto" panose="02000000000000000000" pitchFamily="2" charset="0"/>
+              </a:rPr>
+              <a:t>the amount or distance by which something is out of line”</a:t>
+            </a:r>
+            <a:r>
+              <a:rPr lang="en-US" b="0" i="0" dirty="0">
+                <a:solidFill>
+                  <a:srgbClr val="000000"/>
+                </a:solidFill>
+                <a:effectLst/>
+                <a:latin typeface="Verdana" panose="020B0604030504040204" pitchFamily="34" charset="0"/>
+              </a:rPr>
+              <a:t> </a:t>
+            </a:r>
+            <a:endParaRPr lang="en-US" dirty="0"/>
+          </a:p>
+        </p:txBody>
+      </p:sp>
+      <p:sp>
+        <p:nvSpPr>
+          <p:cNvPr id="4" name="Slide Number Placeholder 3"/>
+          <p:cNvSpPr>
+            <a:spLocks noGrp="1"/>
+          </p:cNvSpPr>
+          <p:nvPr>
+            <p:ph type="sldNum" sz="quarter" idx="5"/>
+          </p:nvPr>
+        </p:nvSpPr>
+        <p:spPr/>
+        <p:txBody>
+          <a:bodyPr/>
+          <a:lstStyle/>
+          <a:p>
+            <a:fld id="{B550150B-B319-4329-8BD6-30423CB3C447}" type="slidenum">
+              <a:rPr lang="en-US" smtClean="0"/>
+              <a:t>9</a:t>
+            </a:fld>
+            <a:endParaRPr lang="en-US"/>
+          </a:p>
+        </p:txBody>
+      </p:sp>
+    </p:spTree>
+    <p:extLst>
+      <p:ext uri="{BB962C8B-B14F-4D97-AF65-F5344CB8AC3E}">
+        <p14:creationId xmlns:p14="http://schemas.microsoft.com/office/powerpoint/2010/main" val="665891224"/>
+      </p:ext>
+    </p:extLst>
+  </p:cSld>
+  <p:clrMapOvr>
+    <a:masterClrMapping/>
+  </p:clrMapOvr>
+</p:notes>
+</file>
+
+<file path=ppt/notesSlides/notesSlide7.xml><?xml version="1.0" encoding="utf-8"?>
+<p:notes xmlns:a="http://schemas.openxmlformats.org/drawingml/2006/main" xmlns:r="http://schemas.openxmlformats.org/officeDocument/2006/relationships" xmlns:p="http://schemas.openxmlformats.org/presentationml/2006/main">
+  <p:cSld>
+    <p:spTree>
+      <p:nvGrpSpPr>
+        <p:cNvPr id="1" name=""/>
+        <p:cNvGrpSpPr/>
+        <p:nvPr/>
+      </p:nvGrpSpPr>
+      <p:grpSpPr>
+        <a:xfrm>
+          <a:off x="0" y="0"/>
+          <a:ext cx="0" cy="0"/>
+          <a:chOff x="0" y="0"/>
+          <a:chExt cx="0" cy="0"/>
+        </a:xfrm>
+      </p:grpSpPr>
+      <p:sp>
+        <p:nvSpPr>
+          <p:cNvPr id="2" name="Slide Image Placeholder 1"/>
+          <p:cNvSpPr>
+            <a:spLocks noGrp="1" noRot="1" noChangeAspect="1"/>
+          </p:cNvSpPr>
+          <p:nvPr>
+            <p:ph type="sldImg"/>
+          </p:nvPr>
+        </p:nvSpPr>
+        <p:spPr/>
+      </p:sp>
+      <p:sp>
+        <p:nvSpPr>
+          <p:cNvPr id="3" name="Notes Placeholder 2"/>
+          <p:cNvSpPr>
+            <a:spLocks noGrp="1"/>
+          </p:cNvSpPr>
+          <p:nvPr>
+            <p:ph type="body" idx="1"/>
+          </p:nvPr>
+        </p:nvSpPr>
+        <p:spPr/>
+        <p:txBody>
+          <a:bodyPr/>
+          <a:lstStyle/>
+          <a:p>
+            <a:r>
+              <a:rPr lang="en-US" b="0" i="0" dirty="0">
+                <a:solidFill>
+                  <a:srgbClr val="000000"/>
+                </a:solidFill>
+                <a:effectLst/>
+                <a:latin typeface="Verdana" panose="020B0604030504040204" pitchFamily="34" charset="0"/>
+              </a:rPr>
+              <a:t>In its simplest use, you only specify the horizontal shadow (2px) and the vertical shadow (2px): </a:t>
+            </a:r>
+            <a:br>
+              <a:rPr lang="en-US" b="0" i="0" dirty="0">
+                <a:solidFill>
+                  <a:srgbClr val="000000"/>
+                </a:solidFill>
+                <a:effectLst/>
+                <a:latin typeface="Verdana" panose="020B0604030504040204" pitchFamily="34" charset="0"/>
+              </a:rPr>
+            </a:br>
+            <a:r>
+              <a:rPr lang="en-US" b="0" i="0" dirty="0">
+                <a:solidFill>
+                  <a:srgbClr val="000000"/>
+                </a:solidFill>
+                <a:effectLst/>
+                <a:latin typeface="Verdana" panose="020B0604030504040204" pitchFamily="34" charset="0"/>
+              </a:rPr>
+              <a:t>Since for most of us English is not our native tongue let me bring to the table the meaning of offset: “</a:t>
+            </a:r>
+            <a:r>
+              <a:rPr lang="en-US" b="0" i="0" dirty="0">
+                <a:effectLst/>
+                <a:latin typeface="Roboto" panose="02000000000000000000" pitchFamily="2" charset="0"/>
+              </a:rPr>
+              <a:t>the amount or distance by which something is out of line”</a:t>
+            </a:r>
+            <a:r>
+              <a:rPr lang="en-US" b="0" i="0" dirty="0">
+                <a:solidFill>
+                  <a:srgbClr val="000000"/>
+                </a:solidFill>
+                <a:effectLst/>
+                <a:latin typeface="Verdana" panose="020B0604030504040204" pitchFamily="34" charset="0"/>
+              </a:rPr>
+              <a:t> </a:t>
+            </a:r>
+            <a:endParaRPr lang="en-US" dirty="0"/>
+          </a:p>
+        </p:txBody>
+      </p:sp>
+      <p:sp>
+        <p:nvSpPr>
+          <p:cNvPr id="4" name="Slide Number Placeholder 3"/>
+          <p:cNvSpPr>
+            <a:spLocks noGrp="1"/>
+          </p:cNvSpPr>
+          <p:nvPr>
+            <p:ph type="sldNum" sz="quarter" idx="5"/>
+          </p:nvPr>
+        </p:nvSpPr>
+        <p:spPr/>
+        <p:txBody>
+          <a:bodyPr/>
+          <a:lstStyle/>
+          <a:p>
+            <a:fld id="{B550150B-B319-4329-8BD6-30423CB3C447}" type="slidenum">
+              <a:rPr lang="en-US" smtClean="0"/>
+              <a:t>10</a:t>
+            </a:fld>
+            <a:endParaRPr lang="en-US"/>
+          </a:p>
+        </p:txBody>
+      </p:sp>
+    </p:spTree>
+    <p:extLst>
+      <p:ext uri="{BB962C8B-B14F-4D97-AF65-F5344CB8AC3E}">
+        <p14:creationId xmlns:p14="http://schemas.microsoft.com/office/powerpoint/2010/main" val="1631922497"/>
       </p:ext>
     </p:extLst>
   </p:cSld>
@@ -1104,7 +1947,7 @@
           <a:p>
             <a:fld id="{12A0A7D6-D496-47ED-A05D-654D4E2FEA84}" type="datetimeFigureOut">
               <a:rPr lang="en-US" smtClean="0"/>
-              <a:t>5/25/2022</a:t>
+              <a:t>5/30/2022</a:t>
             </a:fld>
             <a:endParaRPr lang="en-US"/>
           </a:p>
@@ -1302,7 +2145,7 @@
           <a:p>
             <a:fld id="{12A0A7D6-D496-47ED-A05D-654D4E2FEA84}" type="datetimeFigureOut">
               <a:rPr lang="en-US" smtClean="0"/>
-              <a:t>5/25/2022</a:t>
+              <a:t>5/30/2022</a:t>
             </a:fld>
             <a:endParaRPr lang="en-US"/>
           </a:p>
@@ -1510,7 +2353,7 @@
           <a:p>
             <a:fld id="{12A0A7D6-D496-47ED-A05D-654D4E2FEA84}" type="datetimeFigureOut">
               <a:rPr lang="en-US" smtClean="0"/>
-              <a:t>5/25/2022</a:t>
+              <a:t>5/30/2022</a:t>
             </a:fld>
             <a:endParaRPr lang="en-US"/>
           </a:p>
@@ -1708,7 +2551,7 @@
           <a:p>
             <a:fld id="{12A0A7D6-D496-47ED-A05D-654D4E2FEA84}" type="datetimeFigureOut">
               <a:rPr lang="en-US" smtClean="0"/>
-              <a:t>5/25/2022</a:t>
+              <a:t>5/30/2022</a:t>
             </a:fld>
             <a:endParaRPr lang="en-US"/>
           </a:p>
@@ -1983,7 +2826,7 @@
           <a:p>
             <a:fld id="{12A0A7D6-D496-47ED-A05D-654D4E2FEA84}" type="datetimeFigureOut">
               <a:rPr lang="en-US" smtClean="0"/>
-              <a:t>5/25/2022</a:t>
+              <a:t>5/30/2022</a:t>
             </a:fld>
             <a:endParaRPr lang="en-US"/>
           </a:p>
@@ -2248,7 +3091,7 @@
           <a:p>
             <a:fld id="{12A0A7D6-D496-47ED-A05D-654D4E2FEA84}" type="datetimeFigureOut">
               <a:rPr lang="en-US" smtClean="0"/>
-              <a:t>5/25/2022</a:t>
+              <a:t>5/30/2022</a:t>
             </a:fld>
             <a:endParaRPr lang="en-US"/>
           </a:p>
@@ -2660,7 +3503,7 @@
           <a:p>
             <a:fld id="{12A0A7D6-D496-47ED-A05D-654D4E2FEA84}" type="datetimeFigureOut">
               <a:rPr lang="en-US" smtClean="0"/>
-              <a:t>5/25/2022</a:t>
+              <a:t>5/30/2022</a:t>
             </a:fld>
             <a:endParaRPr lang="en-US"/>
           </a:p>
@@ -2801,7 +3644,7 @@
           <a:p>
             <a:fld id="{12A0A7D6-D496-47ED-A05D-654D4E2FEA84}" type="datetimeFigureOut">
               <a:rPr lang="en-US" smtClean="0"/>
-              <a:t>5/25/2022</a:t>
+              <a:t>5/30/2022</a:t>
             </a:fld>
             <a:endParaRPr lang="en-US"/>
           </a:p>
@@ -2914,7 +3757,7 @@
           <a:p>
             <a:fld id="{12A0A7D6-D496-47ED-A05D-654D4E2FEA84}" type="datetimeFigureOut">
               <a:rPr lang="en-US" smtClean="0"/>
-              <a:t>5/25/2022</a:t>
+              <a:t>5/30/2022</a:t>
             </a:fld>
             <a:endParaRPr lang="en-US"/>
           </a:p>
@@ -3225,7 +4068,7 @@
           <a:p>
             <a:fld id="{12A0A7D6-D496-47ED-A05D-654D4E2FEA84}" type="datetimeFigureOut">
               <a:rPr lang="en-US" smtClean="0"/>
-              <a:t>5/25/2022</a:t>
+              <a:t>5/30/2022</a:t>
             </a:fld>
             <a:endParaRPr lang="en-US"/>
           </a:p>
@@ -3513,7 +4356,7 @@
           <a:p>
             <a:fld id="{12A0A7D6-D496-47ED-A05D-654D4E2FEA84}" type="datetimeFigureOut">
               <a:rPr lang="en-US" smtClean="0"/>
-              <a:t>5/25/2022</a:t>
+              <a:t>5/30/2022</a:t>
             </a:fld>
             <a:endParaRPr lang="en-US"/>
           </a:p>
@@ -3754,7 +4597,7 @@
           <a:p>
             <a:fld id="{12A0A7D6-D496-47ED-A05D-654D4E2FEA84}" type="datetimeFigureOut">
               <a:rPr lang="en-US" smtClean="0"/>
-              <a:t>5/25/2022</a:t>
+              <a:t>5/30/2022</a:t>
             </a:fld>
             <a:endParaRPr lang="en-US"/>
           </a:p>
@@ -4771,7 +5614,7 @@
 </p:sld>
 </file>
 
-<file path=ppt/slides/slide2.xml><?xml version="1.0" encoding="utf-8"?>
+<file path=ppt/slides/slide10.xml><?xml version="1.0" encoding="utf-8"?>
 <p:sld xmlns:a="http://schemas.openxmlformats.org/drawingml/2006/main" xmlns:r="http://schemas.openxmlformats.org/officeDocument/2006/relationships" xmlns:p="http://schemas.openxmlformats.org/presentationml/2006/main">
   <p:cSld>
     <p:spTree>
@@ -4801,7 +5644,7 @@
           <p:nvPr/>
         </p:nvSpPr>
         <p:spPr>
-          <a:xfrm rot="10800000" flipH="1">
+          <a:xfrm>
             <a:off x="0" y="0"/>
             <a:ext cx="12192000" cy="6858000"/>
           </a:xfrm>
@@ -4834,6 +5677,218 @@
           <a:p>
             <a:pPr algn="ctr"/>
             <a:endParaRPr lang="en-US"/>
+          </a:p>
+        </p:txBody>
+      </p:sp>
+      <p:sp>
+        <p:nvSpPr>
+          <p:cNvPr id="2" name="Title 1">
+            <a:extLst>
+              <a:ext uri="{FF2B5EF4-FFF2-40B4-BE49-F238E27FC236}">
+                <a16:creationId xmlns:a16="http://schemas.microsoft.com/office/drawing/2014/main" id="{9917D819-851E-FA77-E701-00C35E33ACA8}"/>
+              </a:ext>
+            </a:extLst>
+          </p:cNvPr>
+          <p:cNvSpPr>
+            <a:spLocks noGrp="1"/>
+          </p:cNvSpPr>
+          <p:nvPr>
+            <p:ph type="title"/>
+          </p:nvPr>
+        </p:nvSpPr>
+        <p:spPr>
+          <a:xfrm>
+            <a:off x="838200" y="41946"/>
+            <a:ext cx="10515600" cy="1325563"/>
+          </a:xfrm>
+        </p:spPr>
+        <p:txBody>
+          <a:bodyPr/>
+          <a:lstStyle/>
+          <a:p>
+            <a:r>
+              <a:rPr lang="en-US" sz="5400" dirty="0">
+                <a:solidFill>
+                  <a:srgbClr val="00B050"/>
+                </a:solidFill>
+                <a:effectLst>
+                  <a:outerShdw blurRad="38100" dist="38100" dir="2700000" algn="tl">
+                    <a:srgbClr val="000000">
+                      <a:alpha val="43137"/>
+                    </a:srgbClr>
+                  </a:outerShdw>
+                </a:effectLst>
+              </a:rPr>
+              <a:t>text-shadow</a:t>
+            </a:r>
+            <a:endParaRPr lang="en-US" dirty="0"/>
+          </a:p>
+        </p:txBody>
+      </p:sp>
+      <p:pic>
+        <p:nvPicPr>
+          <p:cNvPr id="10" name="Picture 9">
+            <a:extLst>
+              <a:ext uri="{FF2B5EF4-FFF2-40B4-BE49-F238E27FC236}">
+                <a16:creationId xmlns:a16="http://schemas.microsoft.com/office/drawing/2014/main" id="{B977914C-501D-AFB9-29B7-9ED1512E5EB1}"/>
+              </a:ext>
+            </a:extLst>
+          </p:cNvPr>
+          <p:cNvPicPr>
+            <a:picLocks noChangeAspect="1"/>
+          </p:cNvPicPr>
+          <p:nvPr/>
+        </p:nvPicPr>
+        <p:blipFill rotWithShape="1">
+          <a:blip r:embed="rId3"/>
+          <a:srcRect t="37838" r="51560" b="45502"/>
+          <a:stretch/>
+        </p:blipFill>
+        <p:spPr>
+          <a:xfrm>
+            <a:off x="838200" y="1533443"/>
+            <a:ext cx="4484078" cy="969538"/>
+          </a:xfrm>
+          <a:prstGeom prst="rect">
+            <a:avLst/>
+          </a:prstGeom>
+        </p:spPr>
+      </p:pic>
+      <p:pic>
+        <p:nvPicPr>
+          <p:cNvPr id="12" name="Picture 11">
+            <a:extLst>
+              <a:ext uri="{FF2B5EF4-FFF2-40B4-BE49-F238E27FC236}">
+                <a16:creationId xmlns:a16="http://schemas.microsoft.com/office/drawing/2014/main" id="{86F480AA-9153-F494-89AD-A818655CFB2B}"/>
+              </a:ext>
+            </a:extLst>
+          </p:cNvPr>
+          <p:cNvPicPr>
+            <a:picLocks noChangeAspect="1"/>
+          </p:cNvPicPr>
+          <p:nvPr/>
+        </p:nvPicPr>
+        <p:blipFill rotWithShape="1">
+          <a:blip r:embed="rId3"/>
+          <a:srcRect t="56358" r="51560" b="26981"/>
+          <a:stretch/>
+        </p:blipFill>
+        <p:spPr>
+          <a:xfrm>
+            <a:off x="838200" y="3226183"/>
+            <a:ext cx="4484078" cy="969538"/>
+          </a:xfrm>
+          <a:prstGeom prst="rect">
+            <a:avLst/>
+          </a:prstGeom>
+        </p:spPr>
+      </p:pic>
+      <p:pic>
+        <p:nvPicPr>
+          <p:cNvPr id="5" name="Picture 4">
+            <a:extLst>
+              <a:ext uri="{FF2B5EF4-FFF2-40B4-BE49-F238E27FC236}">
+                <a16:creationId xmlns:a16="http://schemas.microsoft.com/office/drawing/2014/main" id="{14AC0B84-2396-E62C-9748-D55A02AE46D3}"/>
+              </a:ext>
+            </a:extLst>
+          </p:cNvPr>
+          <p:cNvPicPr>
+            <a:picLocks noChangeAspect="1"/>
+          </p:cNvPicPr>
+          <p:nvPr/>
+        </p:nvPicPr>
+        <p:blipFill>
+          <a:blip r:embed="rId4"/>
+          <a:stretch>
+            <a:fillRect/>
+          </a:stretch>
+        </p:blipFill>
+        <p:spPr>
+          <a:xfrm>
+            <a:off x="838200" y="4777050"/>
+            <a:ext cx="5029813" cy="1124948"/>
+          </a:xfrm>
+          <a:prstGeom prst="rect">
+            <a:avLst/>
+          </a:prstGeom>
+        </p:spPr>
+      </p:pic>
+    </p:spTree>
+    <p:extLst>
+      <p:ext uri="{BB962C8B-B14F-4D97-AF65-F5344CB8AC3E}">
+        <p14:creationId xmlns:p14="http://schemas.microsoft.com/office/powerpoint/2010/main" val="2915599507"/>
+      </p:ext>
+    </p:extLst>
+  </p:cSld>
+  <p:clrMapOvr>
+    <a:masterClrMapping/>
+  </p:clrMapOvr>
+</p:sld>
+</file>
+
+<file path=ppt/slides/slide2.xml><?xml version="1.0" encoding="utf-8"?>
+<p:sld xmlns:a="http://schemas.openxmlformats.org/drawingml/2006/main" xmlns:r="http://schemas.openxmlformats.org/officeDocument/2006/relationships" xmlns:p="http://schemas.openxmlformats.org/presentationml/2006/main">
+  <p:cSld>
+    <p:spTree>
+      <p:nvGrpSpPr>
+        <p:cNvPr id="1" name=""/>
+        <p:cNvGrpSpPr/>
+        <p:nvPr/>
+      </p:nvGrpSpPr>
+      <p:grpSpPr>
+        <a:xfrm>
+          <a:off x="0" y="0"/>
+          <a:ext cx="0" cy="0"/>
+          <a:chOff x="0" y="0"/>
+          <a:chExt cx="0" cy="0"/>
+        </a:xfrm>
+      </p:grpSpPr>
+      <p:sp>
+        <p:nvSpPr>
+          <p:cNvPr id="4" name="Rectangle: Diagonal Corners Snipped 3">
+            <a:extLst>
+              <a:ext uri="{FF2B5EF4-FFF2-40B4-BE49-F238E27FC236}">
+                <a16:creationId xmlns:a16="http://schemas.microsoft.com/office/drawing/2014/main" id="{5A7A049A-02BB-7905-AD0F-3896DCFCDE78}"/>
+              </a:ext>
+            </a:extLst>
+          </p:cNvPr>
+          <p:cNvSpPr/>
+          <p:nvPr/>
+        </p:nvSpPr>
+        <p:spPr>
+          <a:xfrm rot="10800000" flipH="1">
+            <a:off x="0" y="0"/>
+            <a:ext cx="12192000" cy="6858000"/>
+          </a:xfrm>
+          <a:prstGeom prst="snip2DiagRect">
+            <a:avLst/>
+          </a:prstGeom>
+          <a:ln w="57150">
+            <a:solidFill>
+              <a:schemeClr val="accent2"/>
+            </a:solidFill>
+          </a:ln>
+        </p:spPr>
+        <p:style>
+          <a:lnRef idx="2">
+            <a:schemeClr val="accent2"/>
+          </a:lnRef>
+          <a:fillRef idx="1">
+            <a:schemeClr val="lt1"/>
+          </a:fillRef>
+          <a:effectRef idx="0">
+            <a:schemeClr val="accent2"/>
+          </a:effectRef>
+          <a:fontRef idx="minor">
+            <a:schemeClr val="dk1"/>
+          </a:fontRef>
+        </p:style>
+        <p:txBody>
+          <a:bodyPr rtlCol="0" anchor="ctr"/>
+          <a:lstStyle/>
+          <a:p>
+            <a:pPr algn="ctr"/>
+            <a:endParaRPr lang="en-US" dirty="0"/>
           </a:p>
         </p:txBody>
       </p:sp>
@@ -5026,7 +6081,7 @@
           <a:prstGeom prst="snip2DiagRect">
             <a:avLst/>
           </a:prstGeom>
-          <a:ln w="38100">
+          <a:ln w="57150">
             <a:solidFill>
               <a:schemeClr val="accent2"/>
             </a:solidFill>
@@ -5251,7 +6306,7 @@
           <a:prstGeom prst="snip2DiagRect">
             <a:avLst/>
           </a:prstGeom>
-          <a:ln w="38100">
+          <a:ln w="57150">
             <a:solidFill>
               <a:schemeClr val="accent2"/>
             </a:solidFill>
@@ -5367,50 +6422,6 @@
             <a:pPr marL="0" indent="0">
               <a:buNone/>
             </a:pPr>
-            <a:r>
-              <a:rPr lang="en-US" dirty="0"/>
-              <a:t>                           </a:t>
-            </a:r>
-            <a:endParaRPr lang="en-US" dirty="0">
-              <a:solidFill>
-                <a:srgbClr val="002060"/>
-              </a:solidFill>
-            </a:endParaRPr>
-          </a:p>
-          <a:p>
-            <a:pPr marL="0" indent="0">
-              <a:buNone/>
-            </a:pPr>
-            <a:r>
-              <a:rPr lang="en-US" dirty="0">
-                <a:solidFill>
-                  <a:srgbClr val="002060"/>
-                </a:solidFill>
-              </a:rPr>
-              <a:t>/* top-left-and-bottom-right | top-right-and-bottom-left */</a:t>
-            </a:r>
-          </a:p>
-          <a:p>
-            <a:pPr marL="0" indent="0">
-              <a:buNone/>
-            </a:pPr>
-            <a:r>
-              <a:rPr lang="en-US" dirty="0">
-                <a:solidFill>
-                  <a:srgbClr val="00B050"/>
-                </a:solidFill>
-              </a:rPr>
-              <a:t>              border-radius: </a:t>
-            </a:r>
-            <a:r>
-              <a:rPr lang="en-US" dirty="0"/>
-              <a:t>10px 5%;</a:t>
-            </a:r>
-          </a:p>
-          <a:p>
-            <a:pPr marL="0" indent="0">
-              <a:buNone/>
-            </a:pPr>
             <a:endParaRPr lang="en-US" dirty="0"/>
           </a:p>
           <a:p>
@@ -5447,10 +6458,10 @@
       </p:sp>
       <p:cxnSp>
         <p:nvCxnSpPr>
-          <p:cNvPr id="8" name="Straight Arrow Connector 7">
-            <a:extLst>
-              <a:ext uri="{FF2B5EF4-FFF2-40B4-BE49-F238E27FC236}">
-                <a16:creationId xmlns:a16="http://schemas.microsoft.com/office/drawing/2014/main" id="{28B8FF06-2289-8E23-8E52-8A9DA3BCAEC1}"/>
+          <p:cNvPr id="15" name="Straight Arrow Connector 14">
+            <a:extLst>
+              <a:ext uri="{FF2B5EF4-FFF2-40B4-BE49-F238E27FC236}">
+                <a16:creationId xmlns:a16="http://schemas.microsoft.com/office/drawing/2014/main" id="{A6688B12-3C00-C436-ECC9-84892EA93387}"/>
               </a:ext>
             </a:extLst>
           </p:cNvPr>
@@ -5461,95 +6472,7 @@
         </p:nvCxnSpPr>
         <p:spPr>
           <a:xfrm>
-            <a:off x="3051958" y="3740727"/>
-            <a:ext cx="1128156" cy="195425"/>
-          </a:xfrm>
-          <a:prstGeom prst="straightConnector1">
-            <a:avLst/>
-          </a:prstGeom>
-          <a:ln w="38100">
-            <a:solidFill>
-              <a:srgbClr val="FF0000"/>
-            </a:solidFill>
-            <a:tailEnd type="triangle"/>
-          </a:ln>
-        </p:spPr>
-        <p:style>
-          <a:lnRef idx="1">
-            <a:schemeClr val="accent1"/>
-          </a:lnRef>
-          <a:fillRef idx="0">
-            <a:schemeClr val="accent1"/>
-          </a:fillRef>
-          <a:effectRef idx="0">
-            <a:schemeClr val="accent1"/>
-          </a:effectRef>
-          <a:fontRef idx="minor">
-            <a:schemeClr val="tx1"/>
-          </a:fontRef>
-        </p:style>
-      </p:cxnSp>
-      <p:cxnSp>
-        <p:nvCxnSpPr>
-          <p:cNvPr id="10" name="Straight Arrow Connector 9">
-            <a:extLst>
-              <a:ext uri="{FF2B5EF4-FFF2-40B4-BE49-F238E27FC236}">
-                <a16:creationId xmlns:a16="http://schemas.microsoft.com/office/drawing/2014/main" id="{5E953D24-6D06-77D6-2451-D79FE760C239}"/>
-              </a:ext>
-            </a:extLst>
-          </p:cNvPr>
-          <p:cNvCxnSpPr>
-            <a:cxnSpLocks/>
-          </p:cNvCxnSpPr>
-          <p:nvPr/>
-        </p:nvCxnSpPr>
-        <p:spPr>
-          <a:xfrm flipH="1">
-            <a:off x="5557652" y="3871010"/>
-            <a:ext cx="1425039" cy="130284"/>
-          </a:xfrm>
-          <a:prstGeom prst="straightConnector1">
-            <a:avLst/>
-          </a:prstGeom>
-          <a:ln w="38100">
-            <a:solidFill>
-              <a:srgbClr val="FF0000"/>
-            </a:solidFill>
-            <a:tailEnd type="triangle"/>
-          </a:ln>
-        </p:spPr>
-        <p:style>
-          <a:lnRef idx="1">
-            <a:schemeClr val="accent1"/>
-          </a:lnRef>
-          <a:fillRef idx="0">
-            <a:schemeClr val="accent1"/>
-          </a:fillRef>
-          <a:effectRef idx="0">
-            <a:schemeClr val="accent1"/>
-          </a:effectRef>
-          <a:fontRef idx="minor">
-            <a:schemeClr val="tx1"/>
-          </a:fontRef>
-        </p:style>
-      </p:cxnSp>
-      <p:cxnSp>
-        <p:nvCxnSpPr>
-          <p:cNvPr id="15" name="Straight Arrow Connector 14">
-            <a:extLst>
-              <a:ext uri="{FF2B5EF4-FFF2-40B4-BE49-F238E27FC236}">
-                <a16:creationId xmlns:a16="http://schemas.microsoft.com/office/drawing/2014/main" id="{A6688B12-3C00-C436-ECC9-84892EA93387}"/>
-              </a:ext>
-            </a:extLst>
-          </p:cNvPr>
-          <p:cNvCxnSpPr>
-            <a:cxnSpLocks/>
-          </p:cNvCxnSpPr>
-          <p:nvPr/>
-        </p:nvCxnSpPr>
-        <p:spPr>
-          <a:xfrm>
-            <a:off x="2384961" y="5306291"/>
+            <a:off x="2420130" y="3805869"/>
             <a:ext cx="1128156" cy="195425"/>
           </a:xfrm>
           <a:prstGeom prst="straightConnector1">
@@ -5593,7 +6516,7 @@
         </p:nvCxnSpPr>
         <p:spPr>
           <a:xfrm flipH="1">
-            <a:off x="5557652" y="5404003"/>
+            <a:off x="5499036" y="3806691"/>
             <a:ext cx="1696193" cy="236776"/>
           </a:xfrm>
           <a:prstGeom prst="straightConnector1">
@@ -5637,7 +6560,7 @@
         </p:nvCxnSpPr>
         <p:spPr>
           <a:xfrm>
-            <a:off x="4351317" y="5306291"/>
+            <a:off x="4363040" y="3805869"/>
             <a:ext cx="0" cy="162854"/>
           </a:xfrm>
           <a:prstGeom prst="straightConnector1">
@@ -5715,7 +6638,7 @@
           <a:prstGeom prst="snip2DiagRect">
             <a:avLst/>
           </a:prstGeom>
-          <a:ln w="38100">
+          <a:ln w="57150">
             <a:solidFill>
               <a:schemeClr val="accent2"/>
             </a:solidFill>
@@ -5772,286 +6695,96 @@
           </a:p>
         </p:txBody>
       </p:sp>
-      <p:sp>
-        <p:nvSpPr>
-          <p:cNvPr id="3" name="Content Placeholder 2">
-            <a:extLst>
-              <a:ext uri="{FF2B5EF4-FFF2-40B4-BE49-F238E27FC236}">
-                <a16:creationId xmlns:a16="http://schemas.microsoft.com/office/drawing/2014/main" id="{DCF4C9B5-FCD9-3594-27C8-BEC542C34915}"/>
-              </a:ext>
-            </a:extLst>
-          </p:cNvPr>
-          <p:cNvSpPr>
-            <a:spLocks noGrp="1"/>
-          </p:cNvSpPr>
-          <p:nvPr>
-            <p:ph idx="1"/>
-          </p:nvPr>
-        </p:nvSpPr>
-        <p:spPr/>
-        <p:txBody>
-          <a:bodyPr/>
-          <a:lstStyle/>
-          <a:p>
-            <a:pPr marL="0" indent="0">
-              <a:buNone/>
-            </a:pPr>
-            <a:r>
-              <a:rPr lang="en-US" dirty="0">
-                <a:solidFill>
-                  <a:srgbClr val="002060"/>
-                </a:solidFill>
-              </a:rPr>
-              <a:t>/* top-left | top-right | bottom-right | bottom-left */</a:t>
-            </a:r>
-          </a:p>
-          <a:p>
-            <a:pPr marL="0" indent="0">
-              <a:buNone/>
-            </a:pPr>
-            <a:r>
-              <a:rPr lang="sv-SE" dirty="0">
-                <a:solidFill>
-                  <a:srgbClr val="00B050"/>
-                </a:solidFill>
-              </a:rPr>
-              <a:t>border-radius: </a:t>
-            </a:r>
-            <a:r>
-              <a:rPr lang="sv-SE" dirty="0"/>
-              <a:t>1px 0 3px 4px</a:t>
-            </a:r>
-            <a:endParaRPr lang="en-US" dirty="0"/>
-          </a:p>
-          <a:p>
-            <a:pPr marL="0" indent="0">
-              <a:buNone/>
-            </a:pPr>
-            <a:endParaRPr lang="en-US" dirty="0"/>
-          </a:p>
-          <a:p>
-            <a:pPr marL="0" indent="0">
-              <a:buNone/>
-            </a:pPr>
-            <a:r>
-              <a:rPr lang="en-US" dirty="0">
-                <a:solidFill>
-                  <a:srgbClr val="002060"/>
-                </a:solidFill>
-              </a:rPr>
-              <a:t>/* The syntax of the second radius allows one to four values */</a:t>
-            </a:r>
-          </a:p>
-          <a:p>
-            <a:pPr marL="0" indent="0">
-              <a:buNone/>
-            </a:pPr>
-            <a:r>
-              <a:rPr lang="en-US" dirty="0">
-                <a:solidFill>
-                  <a:srgbClr val="002060"/>
-                </a:solidFill>
-              </a:rPr>
-              <a:t>/* (first radius values) / radius */</a:t>
-            </a:r>
-          </a:p>
-          <a:p>
-            <a:pPr marL="0" indent="0">
-              <a:buNone/>
-            </a:pPr>
-            <a:r>
-              <a:rPr lang="en-US" dirty="0">
-                <a:solidFill>
-                  <a:srgbClr val="00B050"/>
-                </a:solidFill>
-              </a:rPr>
-              <a:t>border-radius: </a:t>
-            </a:r>
-            <a:r>
-              <a:rPr lang="en-US" dirty="0"/>
-              <a:t>10px / 20px;</a:t>
-            </a:r>
-          </a:p>
-        </p:txBody>
-      </p:sp>
-      <p:cxnSp>
-        <p:nvCxnSpPr>
-          <p:cNvPr id="5" name="Straight Arrow Connector 4">
-            <a:extLst>
-              <a:ext uri="{FF2B5EF4-FFF2-40B4-BE49-F238E27FC236}">
-                <a16:creationId xmlns:a16="http://schemas.microsoft.com/office/drawing/2014/main" id="{C063E93A-3545-6FF4-F98E-467BAFC29429}"/>
-              </a:ext>
-            </a:extLst>
-          </p:cNvPr>
-          <p:cNvCxnSpPr>
-            <a:cxnSpLocks/>
-          </p:cNvCxnSpPr>
+      <p:pic>
+        <p:nvPicPr>
+          <p:cNvPr id="9" name="Picture 8">
+            <a:extLst>
+              <a:ext uri="{FF2B5EF4-FFF2-40B4-BE49-F238E27FC236}">
+                <a16:creationId xmlns:a16="http://schemas.microsoft.com/office/drawing/2014/main" id="{F40D997B-E81D-11A9-B0BB-814A6CA6512B}"/>
+              </a:ext>
+            </a:extLst>
+          </p:cNvPr>
+          <p:cNvPicPr>
+            <a:picLocks noChangeAspect="1"/>
+          </p:cNvPicPr>
           <p:nvPr/>
-        </p:nvCxnSpPr>
+        </p:nvPicPr>
+        <p:blipFill>
+          <a:blip r:embed="rId3"/>
+          <a:stretch>
+            <a:fillRect/>
+          </a:stretch>
+        </p:blipFill>
         <p:spPr>
-          <a:xfrm flipH="1">
-            <a:off x="4141272" y="2191124"/>
-            <a:ext cx="415637" cy="248691"/>
+          <a:xfrm>
+            <a:off x="838200" y="2055814"/>
+            <a:ext cx="8035963" cy="1024414"/>
           </a:xfrm>
-          <a:prstGeom prst="straightConnector1">
+          <a:prstGeom prst="rect">
             <a:avLst/>
           </a:prstGeom>
-          <a:ln w="38100">
-            <a:solidFill>
-              <a:srgbClr val="FF0000"/>
-            </a:solidFill>
-            <a:tailEnd type="triangle"/>
-          </a:ln>
         </p:spPr>
-        <p:style>
-          <a:lnRef idx="1">
-            <a:schemeClr val="accent1"/>
-          </a:lnRef>
-          <a:fillRef idx="0">
-            <a:schemeClr val="accent1"/>
-          </a:fillRef>
-          <a:effectRef idx="0">
-            <a:schemeClr val="accent1"/>
-          </a:effectRef>
-          <a:fontRef idx="minor">
-            <a:schemeClr val="tx1"/>
-          </a:fontRef>
-        </p:style>
-      </p:cxnSp>
-      <p:cxnSp>
-        <p:nvCxnSpPr>
-          <p:cNvPr id="7" name="Straight Arrow Connector 6">
-            <a:extLst>
-              <a:ext uri="{FF2B5EF4-FFF2-40B4-BE49-F238E27FC236}">
-                <a16:creationId xmlns:a16="http://schemas.microsoft.com/office/drawing/2014/main" id="{080E6CAD-737A-7DF0-3AB9-BB77AC9F809E}"/>
-              </a:ext>
-            </a:extLst>
-          </p:cNvPr>
-          <p:cNvCxnSpPr>
-            <a:cxnSpLocks/>
-          </p:cNvCxnSpPr>
+      </p:pic>
+      <p:pic>
+        <p:nvPicPr>
+          <p:cNvPr id="11" name="Picture 10">
+            <a:extLst>
+              <a:ext uri="{FF2B5EF4-FFF2-40B4-BE49-F238E27FC236}">
+                <a16:creationId xmlns:a16="http://schemas.microsoft.com/office/drawing/2014/main" id="{A39E8161-43E8-004A-742D-3ECEEC6E4E91}"/>
+              </a:ext>
+            </a:extLst>
+          </p:cNvPr>
+          <p:cNvPicPr>
+            <a:picLocks noChangeAspect="1"/>
+          </p:cNvPicPr>
           <p:nvPr/>
-        </p:nvCxnSpPr>
+        </p:nvPicPr>
+        <p:blipFill>
+          <a:blip r:embed="rId4"/>
+          <a:stretch>
+            <a:fillRect/>
+          </a:stretch>
+        </p:blipFill>
         <p:spPr>
           <a:xfrm>
-            <a:off x="3538847" y="2241295"/>
-            <a:ext cx="142504" cy="228082"/>
+            <a:off x="838200" y="3593962"/>
+            <a:ext cx="7681036" cy="1050494"/>
           </a:xfrm>
-          <a:prstGeom prst="straightConnector1">
+          <a:prstGeom prst="rect">
             <a:avLst/>
           </a:prstGeom>
-          <a:ln w="38100">
-            <a:solidFill>
-              <a:srgbClr val="FF0000"/>
-            </a:solidFill>
-            <a:tailEnd type="triangle"/>
-          </a:ln>
         </p:spPr>
-        <p:style>
-          <a:lnRef idx="1">
-            <a:schemeClr val="accent1"/>
-          </a:lnRef>
-          <a:fillRef idx="0">
-            <a:schemeClr val="accent1"/>
-          </a:fillRef>
-          <a:effectRef idx="0">
-            <a:schemeClr val="accent1"/>
-          </a:effectRef>
-          <a:fontRef idx="minor">
-            <a:schemeClr val="tx1"/>
-          </a:fontRef>
-        </p:style>
-      </p:cxnSp>
-      <p:cxnSp>
-        <p:nvCxnSpPr>
-          <p:cNvPr id="13" name="Straight Arrow Connector 12">
-            <a:extLst>
-              <a:ext uri="{FF2B5EF4-FFF2-40B4-BE49-F238E27FC236}">
-                <a16:creationId xmlns:a16="http://schemas.microsoft.com/office/drawing/2014/main" id="{112DFFCB-5D82-CD2D-D872-DE36F5F98E05}"/>
-              </a:ext>
-            </a:extLst>
-          </p:cNvPr>
-          <p:cNvCxnSpPr>
-            <a:cxnSpLocks/>
-          </p:cNvCxnSpPr>
+      </p:pic>
+      <p:pic>
+        <p:nvPicPr>
+          <p:cNvPr id="14" name="Picture 13">
+            <a:extLst>
+              <a:ext uri="{FF2B5EF4-FFF2-40B4-BE49-F238E27FC236}">
+                <a16:creationId xmlns:a16="http://schemas.microsoft.com/office/drawing/2014/main" id="{CEE52565-88C0-BCDE-EE4B-234F030B8C25}"/>
+              </a:ext>
+            </a:extLst>
+          </p:cNvPr>
+          <p:cNvPicPr>
+            <a:picLocks noChangeAspect="1"/>
+          </p:cNvPicPr>
           <p:nvPr/>
-        </p:nvCxnSpPr>
+        </p:nvPicPr>
+        <p:blipFill>
+          <a:blip r:embed="rId5"/>
+          <a:stretch>
+            <a:fillRect/>
+          </a:stretch>
+        </p:blipFill>
         <p:spPr>
           <a:xfrm>
-            <a:off x="2362695" y="2191124"/>
-            <a:ext cx="716231" cy="278253"/>
+            <a:off x="8874163" y="3080228"/>
+            <a:ext cx="2720400" cy="2675803"/>
           </a:xfrm>
-          <a:prstGeom prst="straightConnector1">
+          <a:prstGeom prst="rect">
             <a:avLst/>
           </a:prstGeom>
-          <a:ln w="38100">
-            <a:solidFill>
-              <a:srgbClr val="FF0000"/>
-            </a:solidFill>
-            <a:tailEnd type="triangle"/>
-          </a:ln>
         </p:spPr>
-        <p:style>
-          <a:lnRef idx="1">
-            <a:schemeClr val="accent1"/>
-          </a:lnRef>
-          <a:fillRef idx="0">
-            <a:schemeClr val="accent1"/>
-          </a:fillRef>
-          <a:effectRef idx="0">
-            <a:schemeClr val="accent1"/>
-          </a:effectRef>
-          <a:fontRef idx="minor">
-            <a:schemeClr val="tx1"/>
-          </a:fontRef>
-        </p:style>
-      </p:cxnSp>
-      <p:cxnSp>
-        <p:nvCxnSpPr>
-          <p:cNvPr id="26" name="Connector: Elbow 25">
-            <a:extLst>
-              <a:ext uri="{FF2B5EF4-FFF2-40B4-BE49-F238E27FC236}">
-                <a16:creationId xmlns:a16="http://schemas.microsoft.com/office/drawing/2014/main" id="{AE917921-80B4-23C9-BC3D-8AF8E82DF4C1}"/>
-              </a:ext>
-            </a:extLst>
-          </p:cNvPr>
-          <p:cNvCxnSpPr>
-            <a:cxnSpLocks/>
-          </p:cNvCxnSpPr>
-          <p:nvPr/>
-        </p:nvCxnSpPr>
-        <p:spPr>
-          <a:xfrm rot="10800000" flipV="1">
-            <a:off x="5016832" y="2191124"/>
-            <a:ext cx="3177142" cy="420532"/>
-          </a:xfrm>
-          <a:prstGeom prst="bentConnector3">
-            <a:avLst>
-              <a:gd name="adj1" fmla="val -3076"/>
-            </a:avLst>
-          </a:prstGeom>
-          <a:ln w="38100">
-            <a:solidFill>
-              <a:srgbClr val="FF0000"/>
-            </a:solidFill>
-            <a:tailEnd type="triangle"/>
-          </a:ln>
-        </p:spPr>
-        <p:style>
-          <a:lnRef idx="1">
-            <a:schemeClr val="accent1"/>
-          </a:lnRef>
-          <a:fillRef idx="0">
-            <a:schemeClr val="accent1"/>
-          </a:fillRef>
-          <a:effectRef idx="0">
-            <a:schemeClr val="accent1"/>
-          </a:effectRef>
-          <a:fontRef idx="minor">
-            <a:schemeClr val="tx1"/>
-          </a:fontRef>
-        </p:style>
-      </p:cxnSp>
+      </p:pic>
     </p:spTree>
     <p:extLst>
       <p:ext uri="{BB962C8B-B14F-4D97-AF65-F5344CB8AC3E}">
@@ -6102,10 +6835,11 @@
           <a:prstGeom prst="snip2DiagRect">
             <a:avLst/>
           </a:prstGeom>
-          <a:ln w="38100">
+          <a:ln w="57150">
             <a:solidFill>
               <a:schemeClr val="accent2"/>
             </a:solidFill>
+            <a:prstDash val="sysDot"/>
           </a:ln>
         </p:spPr>
         <p:style>
@@ -6152,7 +6886,10 @@
           <a:bodyPr/>
           <a:lstStyle/>
           <a:p>
-            <a:endParaRPr lang="en-US"/>
+            <a:r>
+              <a:rPr lang="en-US" dirty="0"/>
+              <a:t>Borders</a:t>
+            </a:r>
           </a:p>
         </p:txBody>
       </p:sp>
@@ -6177,7 +6914,113 @@
           <a:bodyPr/>
           <a:lstStyle/>
           <a:p>
-            <a:endParaRPr lang="en-US" dirty="0"/>
+            <a:r>
+              <a:rPr lang="en-US" dirty="0"/>
+              <a:t>The </a:t>
+            </a:r>
+            <a:r>
+              <a:rPr lang="en-US" dirty="0">
+                <a:solidFill>
+                  <a:srgbClr val="00B050"/>
+                </a:solidFill>
+              </a:rPr>
+              <a:t>border</a:t>
+            </a:r>
+            <a:r>
+              <a:rPr lang="en-US" dirty="0"/>
+              <a:t> property is a shorthand property for:</a:t>
+            </a:r>
+          </a:p>
+          <a:p>
+            <a:r>
+              <a:rPr lang="en-US" dirty="0">
+                <a:solidFill>
+                  <a:srgbClr val="00B050"/>
+                </a:solidFill>
+              </a:rPr>
+              <a:t>border-width</a:t>
+            </a:r>
+          </a:p>
+          <a:p>
+            <a:r>
+              <a:rPr lang="en-US" dirty="0">
+                <a:solidFill>
+                  <a:srgbClr val="00B050"/>
+                </a:solidFill>
+              </a:rPr>
+              <a:t>border-color</a:t>
+            </a:r>
+          </a:p>
+          <a:p>
+            <a:pPr marL="0" indent="0">
+              <a:buNone/>
+            </a:pPr>
+            <a:r>
+              <a:rPr lang="en-US" dirty="0">
+                <a:solidFill>
+                  <a:schemeClr val="accent1">
+                    <a:lumMod val="75000"/>
+                  </a:schemeClr>
+                </a:solidFill>
+              </a:rPr>
+              <a:t>/*If </a:t>
+            </a:r>
+            <a:r>
+              <a:rPr lang="en-US" dirty="0">
+                <a:solidFill>
+                  <a:srgbClr val="00B050"/>
+                </a:solidFill>
+              </a:rPr>
+              <a:t>border-color</a:t>
+            </a:r>
+            <a:r>
+              <a:rPr lang="en-US" dirty="0"/>
+              <a:t> </a:t>
+            </a:r>
+            <a:r>
+              <a:rPr lang="en-US" dirty="0">
+                <a:solidFill>
+                  <a:schemeClr val="accent1">
+                    <a:lumMod val="75000"/>
+                  </a:schemeClr>
+                </a:solidFill>
+              </a:rPr>
+              <a:t>is omitted, the color applied will be the color of the text*/</a:t>
+            </a:r>
+          </a:p>
+          <a:p>
+            <a:pPr marL="0" indent="0">
+              <a:buNone/>
+            </a:pPr>
+            <a:endParaRPr lang="en-US" dirty="0">
+              <a:solidFill>
+                <a:schemeClr val="accent1">
+                  <a:lumMod val="75000"/>
+                </a:schemeClr>
+              </a:solidFill>
+            </a:endParaRPr>
+          </a:p>
+          <a:p>
+            <a:r>
+              <a:rPr lang="en-US" dirty="0">
+                <a:solidFill>
+                  <a:srgbClr val="00B050"/>
+                </a:solidFill>
+              </a:rPr>
+              <a:t>border-style (required)</a:t>
+            </a:r>
+          </a:p>
+          <a:p>
+            <a:pPr marL="0" indent="0">
+              <a:buNone/>
+            </a:pPr>
+            <a:endParaRPr lang="en-US" dirty="0">
+              <a:solidFill>
+                <a:schemeClr val="accent1">
+                  <a:lumMod val="75000"/>
+                </a:schemeClr>
+              </a:solidFill>
+            </a:endParaRPr>
           </a:p>
         </p:txBody>
       </p:sp>
@@ -6231,6 +7074,520 @@
           <a:prstGeom prst="snip2DiagRect">
             <a:avLst/>
           </a:prstGeom>
+          <a:ln w="57150">
+            <a:solidFill>
+              <a:schemeClr val="accent2"/>
+            </a:solidFill>
+            <a:prstDash val="sysDash"/>
+          </a:ln>
+        </p:spPr>
+        <p:style>
+          <a:lnRef idx="2">
+            <a:schemeClr val="accent2"/>
+          </a:lnRef>
+          <a:fillRef idx="1">
+            <a:schemeClr val="lt1"/>
+          </a:fillRef>
+          <a:effectRef idx="0">
+            <a:schemeClr val="accent2"/>
+          </a:effectRef>
+          <a:fontRef idx="minor">
+            <a:schemeClr val="dk1"/>
+          </a:fontRef>
+        </p:style>
+        <p:txBody>
+          <a:bodyPr rtlCol="0" anchor="ctr"/>
+          <a:lstStyle/>
+          <a:p>
+            <a:pPr algn="ctr"/>
+            <a:endParaRPr lang="en-US" dirty="0"/>
+          </a:p>
+        </p:txBody>
+      </p:sp>
+      <p:sp>
+        <p:nvSpPr>
+          <p:cNvPr id="2" name="Title 1">
+            <a:extLst>
+              <a:ext uri="{FF2B5EF4-FFF2-40B4-BE49-F238E27FC236}">
+                <a16:creationId xmlns:a16="http://schemas.microsoft.com/office/drawing/2014/main" id="{9917D819-851E-FA77-E701-00C35E33ACA8}"/>
+              </a:ext>
+            </a:extLst>
+          </p:cNvPr>
+          <p:cNvSpPr>
+            <a:spLocks noGrp="1"/>
+          </p:cNvSpPr>
+          <p:nvPr>
+            <p:ph type="title"/>
+          </p:nvPr>
+        </p:nvSpPr>
+        <p:spPr/>
+        <p:txBody>
+          <a:bodyPr/>
+          <a:lstStyle/>
+          <a:p>
+            <a:r>
+              <a:rPr lang="en-US" b="1" dirty="0">
+                <a:solidFill>
+                  <a:srgbClr val="00B050"/>
+                </a:solidFill>
+              </a:rPr>
+              <a:t>Border-style</a:t>
+            </a:r>
+          </a:p>
+        </p:txBody>
+      </p:sp>
+      <p:sp>
+        <p:nvSpPr>
+          <p:cNvPr id="3" name="Content Placeholder 2">
+            <a:extLst>
+              <a:ext uri="{FF2B5EF4-FFF2-40B4-BE49-F238E27FC236}">
+                <a16:creationId xmlns:a16="http://schemas.microsoft.com/office/drawing/2014/main" id="{DCF4C9B5-FCD9-3594-27C8-BEC542C34915}"/>
+              </a:ext>
+            </a:extLst>
+          </p:cNvPr>
+          <p:cNvSpPr>
+            <a:spLocks noGrp="1"/>
+          </p:cNvSpPr>
+          <p:nvPr>
+            <p:ph idx="1"/>
+          </p:nvPr>
+        </p:nvSpPr>
+        <p:spPr>
+          <a:xfrm>
+            <a:off x="838200" y="1690688"/>
+            <a:ext cx="10515600" cy="4351338"/>
+          </a:xfrm>
+        </p:spPr>
+        <p:txBody>
+          <a:bodyPr numCol="2">
+            <a:normAutofit/>
+          </a:bodyPr>
+          <a:lstStyle/>
+          <a:p>
+            <a:r>
+              <a:rPr lang="en-US" b="0" i="0" dirty="0">
+                <a:solidFill>
+                  <a:srgbClr val="000000"/>
+                </a:solidFill>
+                <a:effectLst/>
+                <a:latin typeface="Verdana" panose="020B0604030504040204" pitchFamily="34" charset="0"/>
+              </a:rPr>
+              <a:t>Specifies the style of the border. Default value is "none“</a:t>
+            </a:r>
+          </a:p>
+          <a:p>
+            <a:r>
+              <a:rPr lang="en-US" dirty="0">
+                <a:solidFill>
+                  <a:srgbClr val="000000"/>
+                </a:solidFill>
+                <a:latin typeface="Verdana" panose="020B0604030504040204" pitchFamily="34" charset="0"/>
+              </a:rPr>
+              <a:t>Values:</a:t>
+            </a:r>
+          </a:p>
+          <a:p>
+            <a:pPr lvl="1"/>
+            <a:r>
+              <a:rPr lang="en-US" dirty="0">
+                <a:solidFill>
+                  <a:schemeClr val="accent1"/>
+                </a:solidFill>
+                <a:latin typeface="Verdana" panose="020B0604030504040204" pitchFamily="34" charset="0"/>
+              </a:rPr>
+              <a:t>Solid</a:t>
+            </a:r>
+          </a:p>
+          <a:p>
+            <a:pPr lvl="1"/>
+            <a:r>
+              <a:rPr lang="en-US" dirty="0">
+                <a:solidFill>
+                  <a:schemeClr val="accent1"/>
+                </a:solidFill>
+                <a:latin typeface="Verdana" panose="020B0604030504040204" pitchFamily="34" charset="0"/>
+              </a:rPr>
+              <a:t>Dotted</a:t>
+            </a:r>
+          </a:p>
+          <a:p>
+            <a:pPr lvl="1"/>
+            <a:r>
+              <a:rPr lang="en-US" dirty="0">
+                <a:solidFill>
+                  <a:schemeClr val="accent1"/>
+                </a:solidFill>
+                <a:latin typeface="Verdana" panose="020B0604030504040204" pitchFamily="34" charset="0"/>
+              </a:rPr>
+              <a:t>Dashed</a:t>
+            </a:r>
+          </a:p>
+          <a:p>
+            <a:pPr lvl="1"/>
+            <a:r>
+              <a:rPr lang="en-US" dirty="0">
+                <a:solidFill>
+                  <a:schemeClr val="accent1"/>
+                </a:solidFill>
+                <a:latin typeface="Verdana" panose="020B0604030504040204" pitchFamily="34" charset="0"/>
+              </a:rPr>
+              <a:t>Inset</a:t>
+            </a:r>
+          </a:p>
+          <a:p>
+            <a:pPr lvl="1"/>
+            <a:r>
+              <a:rPr lang="en-US" dirty="0">
+                <a:solidFill>
+                  <a:schemeClr val="accent1"/>
+                </a:solidFill>
+                <a:latin typeface="Verdana" panose="020B0604030504040204" pitchFamily="34" charset="0"/>
+              </a:rPr>
+              <a:t>Outset</a:t>
+            </a:r>
+          </a:p>
+          <a:p>
+            <a:pPr lvl="1"/>
+            <a:r>
+              <a:rPr lang="en-US" dirty="0">
+                <a:solidFill>
+                  <a:schemeClr val="accent1"/>
+                </a:solidFill>
+                <a:latin typeface="Verdana" panose="020B0604030504040204" pitchFamily="34" charset="0"/>
+              </a:rPr>
+              <a:t>Ridge</a:t>
+            </a:r>
+          </a:p>
+          <a:p>
+            <a:pPr lvl="1"/>
+            <a:endParaRPr lang="en-US" dirty="0">
+              <a:solidFill>
+                <a:srgbClr val="000000"/>
+              </a:solidFill>
+              <a:latin typeface="Verdana" panose="020B0604030504040204" pitchFamily="34" charset="0"/>
+            </a:endParaRPr>
+          </a:p>
+          <a:p>
+            <a:pPr lvl="1"/>
+            <a:endParaRPr lang="en-US" dirty="0">
+              <a:solidFill>
+                <a:srgbClr val="000000"/>
+              </a:solidFill>
+              <a:latin typeface="Verdana" panose="020B0604030504040204" pitchFamily="34" charset="0"/>
+            </a:endParaRPr>
+          </a:p>
+          <a:p>
+            <a:pPr lvl="1"/>
+            <a:endParaRPr lang="en-US" dirty="0">
+              <a:solidFill>
+                <a:srgbClr val="000000"/>
+              </a:solidFill>
+              <a:latin typeface="Verdana" panose="020B0604030504040204" pitchFamily="34" charset="0"/>
+            </a:endParaRPr>
+          </a:p>
+          <a:p>
+            <a:pPr lvl="1"/>
+            <a:endParaRPr lang="en-US" dirty="0">
+              <a:solidFill>
+                <a:srgbClr val="000000"/>
+              </a:solidFill>
+              <a:latin typeface="Verdana" panose="020B0604030504040204" pitchFamily="34" charset="0"/>
+            </a:endParaRPr>
+          </a:p>
+          <a:p>
+            <a:pPr lvl="1"/>
+            <a:r>
+              <a:rPr lang="en-US" dirty="0">
+                <a:solidFill>
+                  <a:schemeClr val="accent1"/>
+                </a:solidFill>
+                <a:latin typeface="Verdana" panose="020B0604030504040204" pitchFamily="34" charset="0"/>
+              </a:rPr>
+              <a:t>Groove</a:t>
+            </a:r>
+          </a:p>
+          <a:p>
+            <a:pPr lvl="1"/>
+            <a:r>
+              <a:rPr lang="en-US" dirty="0">
+                <a:solidFill>
+                  <a:schemeClr val="accent1"/>
+                </a:solidFill>
+                <a:latin typeface="Verdana" panose="020B0604030504040204" pitchFamily="34" charset="0"/>
+              </a:rPr>
+              <a:t>Double</a:t>
+            </a:r>
+          </a:p>
+          <a:p>
+            <a:pPr lvl="1"/>
+            <a:r>
+              <a:rPr lang="en-US" dirty="0">
+                <a:solidFill>
+                  <a:schemeClr val="accent1"/>
+                </a:solidFill>
+                <a:latin typeface="Verdana" panose="020B0604030504040204" pitchFamily="34" charset="0"/>
+              </a:rPr>
+              <a:t>none</a:t>
+            </a:r>
+          </a:p>
+          <a:p>
+            <a:pPr lvl="1"/>
+            <a:r>
+              <a:rPr lang="en-US" dirty="0">
+                <a:solidFill>
+                  <a:schemeClr val="accent1"/>
+                </a:solidFill>
+                <a:latin typeface="Verdana" panose="020B0604030504040204" pitchFamily="34" charset="0"/>
+              </a:rPr>
+              <a:t>Hidden</a:t>
+            </a:r>
+          </a:p>
+          <a:p>
+            <a:pPr lvl="1"/>
+            <a:endParaRPr lang="en-US" dirty="0">
+              <a:solidFill>
+                <a:srgbClr val="000000"/>
+              </a:solidFill>
+              <a:latin typeface="Verdana" panose="020B0604030504040204" pitchFamily="34" charset="0"/>
+            </a:endParaRPr>
+          </a:p>
+        </p:txBody>
+      </p:sp>
+    </p:spTree>
+    <p:extLst>
+      <p:ext uri="{BB962C8B-B14F-4D97-AF65-F5344CB8AC3E}">
+        <p14:creationId xmlns:p14="http://schemas.microsoft.com/office/powerpoint/2010/main" val="3715975995"/>
+      </p:ext>
+    </p:extLst>
+  </p:cSld>
+  <p:clrMapOvr>
+    <a:masterClrMapping/>
+  </p:clrMapOvr>
+</p:sld>
+</file>
+
+<file path=ppt/slides/slide8.xml><?xml version="1.0" encoding="utf-8"?>
+<p:sld xmlns:a="http://schemas.openxmlformats.org/drawingml/2006/main" xmlns:r="http://schemas.openxmlformats.org/officeDocument/2006/relationships" xmlns:p="http://schemas.openxmlformats.org/presentationml/2006/main">
+  <p:cSld>
+    <p:bg>
+      <p:bgRef idx="1001">
+        <a:schemeClr val="bg1"/>
+      </p:bgRef>
+    </p:bg>
+    <p:spTree>
+      <p:nvGrpSpPr>
+        <p:cNvPr id="1" name=""/>
+        <p:cNvGrpSpPr/>
+        <p:nvPr/>
+      </p:nvGrpSpPr>
+      <p:grpSpPr>
+        <a:xfrm>
+          <a:off x="0" y="0"/>
+          <a:ext cx="0" cy="0"/>
+          <a:chOff x="0" y="0"/>
+          <a:chExt cx="0" cy="0"/>
+        </a:xfrm>
+      </p:grpSpPr>
+      <p:sp>
+        <p:nvSpPr>
+          <p:cNvPr id="4" name="Rectangle: Diagonal Corners Snipped 3">
+            <a:extLst>
+              <a:ext uri="{FF2B5EF4-FFF2-40B4-BE49-F238E27FC236}">
+                <a16:creationId xmlns:a16="http://schemas.microsoft.com/office/drawing/2014/main" id="{5A7A049A-02BB-7905-AD0F-3896DCFCDE78}"/>
+              </a:ext>
+            </a:extLst>
+          </p:cNvPr>
+          <p:cNvSpPr/>
+          <p:nvPr/>
+        </p:nvSpPr>
+        <p:spPr>
+          <a:xfrm rot="10800000">
+            <a:off x="0" y="0"/>
+            <a:ext cx="12192000" cy="6858000"/>
+          </a:xfrm>
+          <a:prstGeom prst="snip2DiagRect">
+            <a:avLst/>
+          </a:prstGeom>
+          <a:ln w="57150">
+            <a:solidFill>
+              <a:schemeClr val="accent2"/>
+            </a:solidFill>
+          </a:ln>
+          <a:effectLst>
+            <a:glow rad="139700">
+              <a:schemeClr val="accent3">
+                <a:satMod val="175000"/>
+                <a:alpha val="40000"/>
+              </a:schemeClr>
+            </a:glow>
+            <a:outerShdw blurRad="50800" dist="38100" dir="10800000" algn="r" rotWithShape="0">
+              <a:prstClr val="black">
+                <a:alpha val="40000"/>
+              </a:prstClr>
+            </a:outerShdw>
+          </a:effectLst>
+        </p:spPr>
+        <p:style>
+          <a:lnRef idx="2">
+            <a:schemeClr val="accent2"/>
+          </a:lnRef>
+          <a:fillRef idx="1">
+            <a:schemeClr val="lt1"/>
+          </a:fillRef>
+          <a:effectRef idx="0">
+            <a:schemeClr val="accent2"/>
+          </a:effectRef>
+          <a:fontRef idx="minor">
+            <a:schemeClr val="dk1"/>
+          </a:fontRef>
+        </p:style>
+        <p:txBody>
+          <a:bodyPr rtlCol="0" anchor="ctr"/>
+          <a:lstStyle/>
+          <a:p>
+            <a:pPr algn="ctr"/>
+            <a:endParaRPr lang="en-US" dirty="0"/>
+          </a:p>
+        </p:txBody>
+      </p:sp>
+      <p:sp>
+        <p:nvSpPr>
+          <p:cNvPr id="2" name="Title 1">
+            <a:extLst>
+              <a:ext uri="{FF2B5EF4-FFF2-40B4-BE49-F238E27FC236}">
+                <a16:creationId xmlns:a16="http://schemas.microsoft.com/office/drawing/2014/main" id="{9917D819-851E-FA77-E701-00C35E33ACA8}"/>
+              </a:ext>
+            </a:extLst>
+          </p:cNvPr>
+          <p:cNvSpPr>
+            <a:spLocks noGrp="1"/>
+          </p:cNvSpPr>
+          <p:nvPr>
+            <p:ph type="title"/>
+          </p:nvPr>
+        </p:nvSpPr>
+        <p:spPr/>
+        <p:txBody>
+          <a:bodyPr/>
+          <a:lstStyle/>
+          <a:p>
+            <a:r>
+              <a:rPr lang="en-US" dirty="0"/>
+              <a:t>Shadow</a:t>
+            </a:r>
+          </a:p>
+        </p:txBody>
+      </p:sp>
+      <p:sp>
+        <p:nvSpPr>
+          <p:cNvPr id="3" name="Content Placeholder 2">
+            <a:extLst>
+              <a:ext uri="{FF2B5EF4-FFF2-40B4-BE49-F238E27FC236}">
+                <a16:creationId xmlns:a16="http://schemas.microsoft.com/office/drawing/2014/main" id="{DCF4C9B5-FCD9-3594-27C8-BEC542C34915}"/>
+              </a:ext>
+            </a:extLst>
+          </p:cNvPr>
+          <p:cNvSpPr>
+            <a:spLocks noGrp="1"/>
+          </p:cNvSpPr>
+          <p:nvPr>
+            <p:ph idx="1"/>
+          </p:nvPr>
+        </p:nvSpPr>
+        <p:spPr/>
+        <p:txBody>
+          <a:bodyPr/>
+          <a:lstStyle/>
+          <a:p>
+            <a:r>
+              <a:rPr lang="en-US" dirty="0"/>
+              <a:t>With CSS you can add shadow to text and to elements.</a:t>
+            </a:r>
+          </a:p>
+          <a:p>
+            <a:r>
+              <a:rPr lang="en-US" dirty="0">
+                <a:solidFill>
+                  <a:srgbClr val="00B050"/>
+                </a:solidFill>
+                <a:effectLst>
+                  <a:outerShdw blurRad="38100" dist="38100" dir="2700000" algn="tl">
+                    <a:srgbClr val="000000">
+                      <a:alpha val="43137"/>
+                    </a:srgbClr>
+                  </a:outerShdw>
+                </a:effectLst>
+              </a:rPr>
+              <a:t>text-shadow</a:t>
+            </a:r>
+          </a:p>
+          <a:p>
+            <a:r>
+              <a:rPr lang="en-US" dirty="0">
+                <a:solidFill>
+                  <a:srgbClr val="00B050"/>
+                </a:solidFill>
+              </a:rPr>
+              <a:t>box-shadow</a:t>
+            </a:r>
+          </a:p>
+        </p:txBody>
+      </p:sp>
+    </p:spTree>
+    <p:extLst>
+      <p:ext uri="{BB962C8B-B14F-4D97-AF65-F5344CB8AC3E}">
+        <p14:creationId xmlns:p14="http://schemas.microsoft.com/office/powerpoint/2010/main" val="3901861615"/>
+      </p:ext>
+    </p:extLst>
+  </p:cSld>
+  <p:clrMapOvr>
+    <a:overrideClrMapping bg1="lt1" tx1="dk1" bg2="lt2" tx2="dk2" accent1="accent1" accent2="accent2" accent3="accent3" accent4="accent4" accent5="accent5" accent6="accent6" hlink="hlink" folHlink="folHlink"/>
+  </p:clrMapOvr>
+</p:sld>
+</file>
+
+<file path=ppt/slides/slide9.xml><?xml version="1.0" encoding="utf-8"?>
+<p:sld xmlns:a="http://schemas.openxmlformats.org/drawingml/2006/main" xmlns:r="http://schemas.openxmlformats.org/officeDocument/2006/relationships" xmlns:p="http://schemas.openxmlformats.org/presentationml/2006/main">
+  <p:cSld>
+    <p:bg>
+      <p:bgRef idx="1001">
+        <a:schemeClr val="bg1"/>
+      </p:bgRef>
+    </p:bg>
+    <p:spTree>
+      <p:nvGrpSpPr>
+        <p:cNvPr id="1" name=""/>
+        <p:cNvGrpSpPr/>
+        <p:nvPr/>
+      </p:nvGrpSpPr>
+      <p:grpSpPr>
+        <a:xfrm>
+          <a:off x="0" y="0"/>
+          <a:ext cx="0" cy="0"/>
+          <a:chOff x="0" y="0"/>
+          <a:chExt cx="0" cy="0"/>
+        </a:xfrm>
+      </p:grpSpPr>
+      <p:sp>
+        <p:nvSpPr>
+          <p:cNvPr id="4" name="Rectangle: Diagonal Corners Snipped 3">
+            <a:extLst>
+              <a:ext uri="{FF2B5EF4-FFF2-40B4-BE49-F238E27FC236}">
+                <a16:creationId xmlns:a16="http://schemas.microsoft.com/office/drawing/2014/main" id="{5A7A049A-02BB-7905-AD0F-3896DCFCDE78}"/>
+              </a:ext>
+            </a:extLst>
+          </p:cNvPr>
+          <p:cNvSpPr/>
+          <p:nvPr/>
+        </p:nvSpPr>
+        <p:spPr>
+          <a:xfrm>
+            <a:off x="0" y="0"/>
+            <a:ext cx="12192000" cy="6858000"/>
+          </a:xfrm>
+          <a:prstGeom prst="snip2DiagRect">
+            <a:avLst/>
+          </a:prstGeom>
           <a:ln w="38100">
             <a:solidFill>
               <a:schemeClr val="accent2"/>
@@ -6276,49 +7633,101 @@
             <p:ph type="title"/>
           </p:nvPr>
         </p:nvSpPr>
-        <p:spPr/>
+        <p:spPr>
+          <a:xfrm>
+            <a:off x="838200" y="421253"/>
+            <a:ext cx="10515600" cy="1325563"/>
+          </a:xfrm>
+        </p:spPr>
         <p:txBody>
           <a:bodyPr/>
           <a:lstStyle/>
           <a:p>
-            <a:endParaRPr lang="en-US"/>
-          </a:p>
-        </p:txBody>
-      </p:sp>
-      <p:sp>
-        <p:nvSpPr>
-          <p:cNvPr id="3" name="Content Placeholder 2">
-            <a:extLst>
-              <a:ext uri="{FF2B5EF4-FFF2-40B4-BE49-F238E27FC236}">
-                <a16:creationId xmlns:a16="http://schemas.microsoft.com/office/drawing/2014/main" id="{DCF4C9B5-FCD9-3594-27C8-BEC542C34915}"/>
-              </a:ext>
-            </a:extLst>
-          </p:cNvPr>
-          <p:cNvSpPr>
-            <a:spLocks noGrp="1"/>
-          </p:cNvSpPr>
+            <a:r>
+              <a:rPr lang="en-US" sz="5400" dirty="0">
+                <a:solidFill>
+                  <a:srgbClr val="00B050"/>
+                </a:solidFill>
+                <a:effectLst>
+                  <a:outerShdw blurRad="38100" dist="38100" dir="2700000" algn="tl">
+                    <a:srgbClr val="000000">
+                      <a:alpha val="43137"/>
+                    </a:srgbClr>
+                  </a:outerShdw>
+                </a:effectLst>
+              </a:rPr>
+              <a:t>text-shadow</a:t>
+            </a:r>
+            <a:endParaRPr lang="en-US" dirty="0"/>
+          </a:p>
+        </p:txBody>
+      </p:sp>
+      <p:pic>
+        <p:nvPicPr>
+          <p:cNvPr id="6" name="Content Placeholder 5">
+            <a:extLst>
+              <a:ext uri="{FF2B5EF4-FFF2-40B4-BE49-F238E27FC236}">
+                <a16:creationId xmlns:a16="http://schemas.microsoft.com/office/drawing/2014/main" id="{01C2B23A-7610-1DB2-6236-0F2AE64EAC19}"/>
+              </a:ext>
+            </a:extLst>
+          </p:cNvPr>
+          <p:cNvPicPr>
+            <a:picLocks noGrp="1" noChangeAspect="1"/>
+          </p:cNvPicPr>
           <p:nvPr>
             <p:ph idx="1"/>
           </p:nvPr>
-        </p:nvSpPr>
-        <p:spPr/>
-        <p:txBody>
-          <a:bodyPr/>
-          <a:lstStyle/>
-          <a:p>
-            <a:endParaRPr lang="en-US"/>
-          </a:p>
-        </p:txBody>
-      </p:sp>
+        </p:nvPicPr>
+        <p:blipFill rotWithShape="1">
+          <a:blip r:embed="rId4"/>
+          <a:srcRect r="35743" b="81988"/>
+          <a:stretch/>
+        </p:blipFill>
+        <p:spPr>
+          <a:xfrm>
+            <a:off x="838200" y="2085415"/>
+            <a:ext cx="5808786" cy="1023579"/>
+          </a:xfrm>
+        </p:spPr>
+      </p:pic>
+      <p:pic>
+        <p:nvPicPr>
+          <p:cNvPr id="8" name="Picture 7">
+            <a:extLst>
+              <a:ext uri="{FF2B5EF4-FFF2-40B4-BE49-F238E27FC236}">
+                <a16:creationId xmlns:a16="http://schemas.microsoft.com/office/drawing/2014/main" id="{BA352696-6AAE-2708-7BCE-BE7160F44F4D}"/>
+              </a:ext>
+            </a:extLst>
+          </p:cNvPr>
+          <p:cNvPicPr>
+            <a:picLocks noChangeAspect="1"/>
+          </p:cNvPicPr>
+          <p:nvPr/>
+        </p:nvPicPr>
+        <p:blipFill rotWithShape="1">
+          <a:blip r:embed="rId4"/>
+          <a:srcRect t="19605" r="34719" b="62096"/>
+          <a:stretch/>
+        </p:blipFill>
+        <p:spPr>
+          <a:xfrm>
+            <a:off x="838199" y="4068535"/>
+            <a:ext cx="5808786" cy="1023579"/>
+          </a:xfrm>
+          <a:prstGeom prst="rect">
+            <a:avLst/>
+          </a:prstGeom>
+        </p:spPr>
+      </p:pic>
     </p:spTree>
     <p:extLst>
       <p:ext uri="{BB962C8B-B14F-4D97-AF65-F5344CB8AC3E}">
-        <p14:creationId xmlns:p14="http://schemas.microsoft.com/office/powerpoint/2010/main" val="3715975995"/>
+        <p14:creationId xmlns:p14="http://schemas.microsoft.com/office/powerpoint/2010/main" val="2597589618"/>
       </p:ext>
     </p:extLst>
   </p:cSld>
   <p:clrMapOvr>
-    <a:masterClrMapping/>
+    <a:overrideClrMapping bg1="lt1" tx1="dk1" bg2="lt2" tx2="dk2" accent1="accent1" accent2="accent2" accent3="accent3" accent4="accent4" accent5="accent5" accent6="accent6" hlink="hlink" folHlink="folHlink"/>
   </p:clrMapOvr>
 </p:sld>
 </file>
@@ -6911,4 +8320,90 @@
     </a:ext>
   </a:extLst>
 </a:theme>
+</file>
+
+<file path=ppt/theme/themeOverride1.xml><?xml version="1.0" encoding="utf-8"?>
+<a:themeOverride xmlns:a="http://schemas.openxmlformats.org/drawingml/2006/main">
+  <a:clrScheme name="Office">
+    <a:dk1>
+      <a:sysClr val="windowText" lastClr="000000"/>
+    </a:dk1>
+    <a:lt1>
+      <a:sysClr val="window" lastClr="FFFFFF"/>
+    </a:lt1>
+    <a:dk2>
+      <a:srgbClr val="44546A"/>
+    </a:dk2>
+    <a:lt2>
+      <a:srgbClr val="E7E6E6"/>
+    </a:lt2>
+    <a:accent1>
+      <a:srgbClr val="4472C4"/>
+    </a:accent1>
+    <a:accent2>
+      <a:srgbClr val="ED7D31"/>
+    </a:accent2>
+    <a:accent3>
+      <a:srgbClr val="A5A5A5"/>
+    </a:accent3>
+    <a:accent4>
+      <a:srgbClr val="FFC000"/>
+    </a:accent4>
+    <a:accent5>
+      <a:srgbClr val="5B9BD5"/>
+    </a:accent5>
+    <a:accent6>
+      <a:srgbClr val="70AD47"/>
+    </a:accent6>
+    <a:hlink>
+      <a:srgbClr val="0563C1"/>
+    </a:hlink>
+    <a:folHlink>
+      <a:srgbClr val="954F72"/>
+    </a:folHlink>
+  </a:clrScheme>
+</a:themeOverride>
+</file>
+
+<file path=ppt/theme/themeOverride2.xml><?xml version="1.0" encoding="utf-8"?>
+<a:themeOverride xmlns:a="http://schemas.openxmlformats.org/drawingml/2006/main">
+  <a:clrScheme name="Office">
+    <a:dk1>
+      <a:sysClr val="windowText" lastClr="000000"/>
+    </a:dk1>
+    <a:lt1>
+      <a:sysClr val="window" lastClr="FFFFFF"/>
+    </a:lt1>
+    <a:dk2>
+      <a:srgbClr val="44546A"/>
+    </a:dk2>
+    <a:lt2>
+      <a:srgbClr val="E7E6E6"/>
+    </a:lt2>
+    <a:accent1>
+      <a:srgbClr val="4472C4"/>
+    </a:accent1>
+    <a:accent2>
+      <a:srgbClr val="ED7D31"/>
+    </a:accent2>
+    <a:accent3>
+      <a:srgbClr val="A5A5A5"/>
+    </a:accent3>
+    <a:accent4>
+      <a:srgbClr val="FFC000"/>
+    </a:accent4>
+    <a:accent5>
+      <a:srgbClr val="5B9BD5"/>
+    </a:accent5>
+    <a:accent6>
+      <a:srgbClr val="70AD47"/>
+    </a:accent6>
+    <a:hlink>
+      <a:srgbClr val="0563C1"/>
+    </a:hlink>
+    <a:folHlink>
+      <a:srgbClr val="954F72"/>
+    </a:folHlink>
+  </a:clrScheme>
+</a:themeOverride>
 </file>